--- a/stack/Stack.pptx
+++ b/stack/Stack.pptx
@@ -5,15 +5,18 @@
     <p:sldMasterId id="2147483648" r:id="rId4"/>
   </p:sldMasterIdLst>
   <p:notesMasterIdLst>
-    <p:notesMasterId r:id="rId11"/>
+    <p:notesMasterId r:id="rId14"/>
   </p:notesMasterIdLst>
   <p:sldIdLst>
-    <p:sldId id="290" r:id="rId5"/>
-    <p:sldId id="293" r:id="rId6"/>
-    <p:sldId id="294" r:id="rId7"/>
-    <p:sldId id="291" r:id="rId8"/>
-    <p:sldId id="295" r:id="rId9"/>
-    <p:sldId id="296" r:id="rId10"/>
+    <p:sldId id="293" r:id="rId5"/>
+    <p:sldId id="299" r:id="rId6"/>
+    <p:sldId id="298" r:id="rId7"/>
+    <p:sldId id="290" r:id="rId8"/>
+    <p:sldId id="297" r:id="rId9"/>
+    <p:sldId id="294" r:id="rId10"/>
+    <p:sldId id="291" r:id="rId11"/>
+    <p:sldId id="295" r:id="rId12"/>
+    <p:sldId id="296" r:id="rId13"/>
   </p:sldIdLst>
   <p:sldSz cx="12192000" cy="6858000"/>
   <p:notesSz cx="6858000" cy="9144000"/>
@@ -210,7 +213,7 @@
           <a:p>
             <a:fld id="{F666E1FD-E7A0-497B-BBC0-740BAAC97C64}" type="datetimeFigureOut">
               <a:rPr lang="en-PH" smtClean="0"/>
-              <a:t>11/05/2026</a:t>
+              <a:t>12/05/2026</a:t>
             </a:fld>
             <a:endParaRPr lang="en-PH"/>
           </a:p>
@@ -604,7 +607,7 @@
     </p:spTree>
     <p:extLst>
       <p:ext uri="{BB962C8B-B14F-4D97-AF65-F5344CB8AC3E}">
-        <p14:creationId xmlns:p14="http://schemas.microsoft.com/office/powerpoint/2010/main" val="3738579796"/>
+        <p14:creationId xmlns:p14="http://schemas.microsoft.com/office/powerpoint/2010/main" val="1347457313"/>
       </p:ext>
     </p:extLst>
   </p:cSld>
@@ -619,7 +622,13 @@
   <p:cSld>
     <p:spTree>
       <p:nvGrpSpPr>
-        <p:cNvPr id="1" name=""/>
+        <p:cNvPr id="1" name="">
+          <a:extLst>
+            <a:ext uri="{FF2B5EF4-FFF2-40B4-BE49-F238E27FC236}">
+              <a16:creationId xmlns:a16="http://schemas.microsoft.com/office/drawing/2014/main" id="{7413540E-C587-62FB-B1EA-8C2FEC83CC06}"/>
+            </a:ext>
+          </a:extLst>
+        </p:cNvPr>
         <p:cNvGrpSpPr/>
         <p:nvPr/>
       </p:nvGrpSpPr>
@@ -633,7 +642,13 @@
       </p:grpSpPr>
       <p:sp>
         <p:nvSpPr>
-          <p:cNvPr id="2" name="Slide Image Placeholder 1"/>
+          <p:cNvPr id="2" name="Slide Image Placeholder 1">
+            <a:extLst>
+              <a:ext uri="{FF2B5EF4-FFF2-40B4-BE49-F238E27FC236}">
+                <a16:creationId xmlns:a16="http://schemas.microsoft.com/office/drawing/2014/main" id="{0BBD9458-BF1F-A0AA-E340-32AD01A197BD}"/>
+              </a:ext>
+            </a:extLst>
+          </p:cNvPr>
           <p:cNvSpPr>
             <a:spLocks noGrp="1" noRot="1" noChangeAspect="1"/>
           </p:cNvSpPr>
@@ -645,7 +660,13 @@
       </p:sp>
       <p:sp>
         <p:nvSpPr>
-          <p:cNvPr id="3" name="Notes Placeholder 2"/>
+          <p:cNvPr id="3" name="Notes Placeholder 2">
+            <a:extLst>
+              <a:ext uri="{FF2B5EF4-FFF2-40B4-BE49-F238E27FC236}">
+                <a16:creationId xmlns:a16="http://schemas.microsoft.com/office/drawing/2014/main" id="{0D1DC58A-EAC5-375E-12AE-373892909B80}"/>
+              </a:ext>
+            </a:extLst>
+          </p:cNvPr>
           <p:cNvSpPr>
             <a:spLocks noGrp="1"/>
           </p:cNvSpPr>
@@ -716,7 +737,13 @@
       </p:sp>
       <p:sp>
         <p:nvSpPr>
-          <p:cNvPr id="4" name="Slide Number Placeholder 3"/>
+          <p:cNvPr id="4" name="Slide Number Placeholder 3">
+            <a:extLst>
+              <a:ext uri="{FF2B5EF4-FFF2-40B4-BE49-F238E27FC236}">
+                <a16:creationId xmlns:a16="http://schemas.microsoft.com/office/drawing/2014/main" id="{0B356AD9-4277-F2C9-D2D6-B8DB7FBDF821}"/>
+              </a:ext>
+            </a:extLst>
+          </p:cNvPr>
           <p:cNvSpPr>
             <a:spLocks noGrp="1"/>
           </p:cNvSpPr>
@@ -740,7 +767,7 @@
     </p:spTree>
     <p:extLst>
       <p:ext uri="{BB962C8B-B14F-4D97-AF65-F5344CB8AC3E}">
-        <p14:creationId xmlns:p14="http://schemas.microsoft.com/office/powerpoint/2010/main" val="1347457313"/>
+        <p14:creationId xmlns:p14="http://schemas.microsoft.com/office/powerpoint/2010/main" val="783504745"/>
       </p:ext>
     </p:extLst>
   </p:cSld>
@@ -755,7 +782,13 @@
   <p:cSld>
     <p:spTree>
       <p:nvGrpSpPr>
-        <p:cNvPr id="1" name=""/>
+        <p:cNvPr id="1" name="">
+          <a:extLst>
+            <a:ext uri="{FF2B5EF4-FFF2-40B4-BE49-F238E27FC236}">
+              <a16:creationId xmlns:a16="http://schemas.microsoft.com/office/drawing/2014/main" id="{94237F67-5F58-79FA-FD97-20BC1DE1AA24}"/>
+            </a:ext>
+          </a:extLst>
+        </p:cNvPr>
         <p:cNvGrpSpPr/>
         <p:nvPr/>
       </p:nvGrpSpPr>
@@ -769,7 +802,13 @@
       </p:grpSpPr>
       <p:sp>
         <p:nvSpPr>
-          <p:cNvPr id="2" name="Slide Image Placeholder 1"/>
+          <p:cNvPr id="2" name="Slide Image Placeholder 1">
+            <a:extLst>
+              <a:ext uri="{FF2B5EF4-FFF2-40B4-BE49-F238E27FC236}">
+                <a16:creationId xmlns:a16="http://schemas.microsoft.com/office/drawing/2014/main" id="{F121FB67-177E-102C-B5EE-5E08026B8F98}"/>
+              </a:ext>
+            </a:extLst>
+          </p:cNvPr>
           <p:cNvSpPr>
             <a:spLocks noGrp="1" noRot="1" noChangeAspect="1"/>
           </p:cNvSpPr>
@@ -781,7 +820,13 @@
       </p:sp>
       <p:sp>
         <p:nvSpPr>
-          <p:cNvPr id="3" name="Notes Placeholder 2"/>
+          <p:cNvPr id="3" name="Notes Placeholder 2">
+            <a:extLst>
+              <a:ext uri="{FF2B5EF4-FFF2-40B4-BE49-F238E27FC236}">
+                <a16:creationId xmlns:a16="http://schemas.microsoft.com/office/drawing/2014/main" id="{95FF9EE6-DD21-1AB2-C4F9-0D6267890297}"/>
+              </a:ext>
+            </a:extLst>
+          </p:cNvPr>
           <p:cNvSpPr>
             <a:spLocks noGrp="1"/>
           </p:cNvSpPr>
@@ -852,7 +897,13 @@
       </p:sp>
       <p:sp>
         <p:nvSpPr>
-          <p:cNvPr id="4" name="Slide Number Placeholder 3"/>
+          <p:cNvPr id="4" name="Slide Number Placeholder 3">
+            <a:extLst>
+              <a:ext uri="{FF2B5EF4-FFF2-40B4-BE49-F238E27FC236}">
+                <a16:creationId xmlns:a16="http://schemas.microsoft.com/office/drawing/2014/main" id="{381B05F9-285B-5351-AD33-D54D85A9717F}"/>
+              </a:ext>
+            </a:extLst>
+          </p:cNvPr>
           <p:cNvSpPr>
             <a:spLocks noGrp="1"/>
           </p:cNvSpPr>
@@ -876,7 +927,7 @@
     </p:spTree>
     <p:extLst>
       <p:ext uri="{BB962C8B-B14F-4D97-AF65-F5344CB8AC3E}">
-        <p14:creationId xmlns:p14="http://schemas.microsoft.com/office/powerpoint/2010/main" val="3062835709"/>
+        <p14:creationId xmlns:p14="http://schemas.microsoft.com/office/powerpoint/2010/main" val="1326045318"/>
       </p:ext>
     </p:extLst>
   </p:cSld>
@@ -1012,7 +1063,7 @@
     </p:spTree>
     <p:extLst>
       <p:ext uri="{BB962C8B-B14F-4D97-AF65-F5344CB8AC3E}">
-        <p14:creationId xmlns:p14="http://schemas.microsoft.com/office/powerpoint/2010/main" val="3503363003"/>
+        <p14:creationId xmlns:p14="http://schemas.microsoft.com/office/powerpoint/2010/main" val="3738579796"/>
       </p:ext>
     </p:extLst>
   </p:cSld>
@@ -1027,7 +1078,13 @@
   <p:cSld>
     <p:spTree>
       <p:nvGrpSpPr>
-        <p:cNvPr id="1" name=""/>
+        <p:cNvPr id="1" name="">
+          <a:extLst>
+            <a:ext uri="{FF2B5EF4-FFF2-40B4-BE49-F238E27FC236}">
+              <a16:creationId xmlns:a16="http://schemas.microsoft.com/office/drawing/2014/main" id="{9F1199C8-2291-FF5B-010A-F6C27AFF8900}"/>
+            </a:ext>
+          </a:extLst>
+        </p:cNvPr>
         <p:cNvGrpSpPr/>
         <p:nvPr/>
       </p:nvGrpSpPr>
@@ -1041,7 +1098,13 @@
       </p:grpSpPr>
       <p:sp>
         <p:nvSpPr>
-          <p:cNvPr id="2" name="Slide Image Placeholder 1"/>
+          <p:cNvPr id="2" name="Slide Image Placeholder 1">
+            <a:extLst>
+              <a:ext uri="{FF2B5EF4-FFF2-40B4-BE49-F238E27FC236}">
+                <a16:creationId xmlns:a16="http://schemas.microsoft.com/office/drawing/2014/main" id="{F07D1A3B-A8FF-E4AA-E15A-2B22EDA709DF}"/>
+              </a:ext>
+            </a:extLst>
+          </p:cNvPr>
           <p:cNvSpPr>
             <a:spLocks noGrp="1" noRot="1" noChangeAspect="1"/>
           </p:cNvSpPr>
@@ -1053,7 +1116,13 @@
       </p:sp>
       <p:sp>
         <p:nvSpPr>
-          <p:cNvPr id="3" name="Notes Placeholder 2"/>
+          <p:cNvPr id="3" name="Notes Placeholder 2">
+            <a:extLst>
+              <a:ext uri="{FF2B5EF4-FFF2-40B4-BE49-F238E27FC236}">
+                <a16:creationId xmlns:a16="http://schemas.microsoft.com/office/drawing/2014/main" id="{22F06508-E026-9CD2-7634-3FE036913710}"/>
+              </a:ext>
+            </a:extLst>
+          </p:cNvPr>
           <p:cNvSpPr>
             <a:spLocks noGrp="1"/>
           </p:cNvSpPr>
@@ -1124,7 +1193,13 @@
       </p:sp>
       <p:sp>
         <p:nvSpPr>
-          <p:cNvPr id="4" name="Slide Number Placeholder 3"/>
+          <p:cNvPr id="4" name="Slide Number Placeholder 3">
+            <a:extLst>
+              <a:ext uri="{FF2B5EF4-FFF2-40B4-BE49-F238E27FC236}">
+                <a16:creationId xmlns:a16="http://schemas.microsoft.com/office/drawing/2014/main" id="{3AA1AC77-4661-8B57-87D8-2E387FD77D91}"/>
+              </a:ext>
+            </a:extLst>
+          </p:cNvPr>
           <p:cNvSpPr>
             <a:spLocks noGrp="1"/>
           </p:cNvSpPr>
@@ -1148,7 +1223,7 @@
     </p:spTree>
     <p:extLst>
       <p:ext uri="{BB962C8B-B14F-4D97-AF65-F5344CB8AC3E}">
-        <p14:creationId xmlns:p14="http://schemas.microsoft.com/office/powerpoint/2010/main" val="553170535"/>
+        <p14:creationId xmlns:p14="http://schemas.microsoft.com/office/powerpoint/2010/main" val="3814271657"/>
       </p:ext>
     </p:extLst>
   </p:cSld>
@@ -1284,6 +1359,414 @@
     </p:spTree>
     <p:extLst>
       <p:ext uri="{BB962C8B-B14F-4D97-AF65-F5344CB8AC3E}">
+        <p14:creationId xmlns:p14="http://schemas.microsoft.com/office/powerpoint/2010/main" val="3062835709"/>
+      </p:ext>
+    </p:extLst>
+  </p:cSld>
+  <p:clrMapOvr>
+    <a:masterClrMapping/>
+  </p:clrMapOvr>
+</p:notes>
+</file>
+
+<file path=ppt/notesSlides/notesSlide7.xml><?xml version="1.0" encoding="utf-8"?>
+<p:notes xmlns:a="http://schemas.openxmlformats.org/drawingml/2006/main" xmlns:r="http://schemas.openxmlformats.org/officeDocument/2006/relationships" xmlns:p="http://schemas.openxmlformats.org/presentationml/2006/main">
+  <p:cSld>
+    <p:spTree>
+      <p:nvGrpSpPr>
+        <p:cNvPr id="1" name=""/>
+        <p:cNvGrpSpPr/>
+        <p:nvPr/>
+      </p:nvGrpSpPr>
+      <p:grpSpPr>
+        <a:xfrm>
+          <a:off x="0" y="0"/>
+          <a:ext cx="0" cy="0"/>
+          <a:chOff x="0" y="0"/>
+          <a:chExt cx="0" cy="0"/>
+        </a:xfrm>
+      </p:grpSpPr>
+      <p:sp>
+        <p:nvSpPr>
+          <p:cNvPr id="2" name="Slide Image Placeholder 1"/>
+          <p:cNvSpPr>
+            <a:spLocks noGrp="1" noRot="1" noChangeAspect="1"/>
+          </p:cNvSpPr>
+          <p:nvPr>
+            <p:ph type="sldImg"/>
+          </p:nvPr>
+        </p:nvSpPr>
+        <p:spPr/>
+      </p:sp>
+      <p:sp>
+        <p:nvSpPr>
+          <p:cNvPr id="3" name="Notes Placeholder 2"/>
+          <p:cNvSpPr>
+            <a:spLocks noGrp="1"/>
+          </p:cNvSpPr>
+          <p:nvPr>
+            <p:ph type="body" idx="1"/>
+          </p:nvPr>
+        </p:nvSpPr>
+        <p:spPr/>
+        <p:txBody>
+          <a:bodyPr/>
+          <a:lstStyle/>
+          <a:p>
+            <a:r>
+              <a:rPr lang="en-US" b="0" i="0" dirty="0">
+                <a:solidFill>
+                  <a:srgbClr val="000000"/>
+                </a:solidFill>
+                <a:effectLst/>
+                <a:latin typeface="Charter"/>
+              </a:rPr>
+              <a:t>Have you asked yourself the question, why do people organize?</a:t>
+            </a:r>
+          </a:p>
+          <a:p>
+            <a:endParaRPr lang="en-US" b="0" i="0" dirty="0">
+              <a:solidFill>
+                <a:srgbClr val="000000"/>
+              </a:solidFill>
+              <a:effectLst/>
+              <a:latin typeface="Charter"/>
+            </a:endParaRPr>
+          </a:p>
+          <a:p>
+            <a:r>
+              <a:rPr lang="en-US" b="0" i="0" dirty="0">
+                <a:solidFill>
+                  <a:srgbClr val="000000"/>
+                </a:solidFill>
+                <a:effectLst/>
+                <a:latin typeface="Charter"/>
+              </a:rPr>
+              <a:t>Lets go to the psychology of organizing</a:t>
+            </a:r>
+          </a:p>
+          <a:p>
+            <a:endParaRPr lang="en-US" b="0" i="0" dirty="0">
+              <a:solidFill>
+                <a:srgbClr val="000000"/>
+              </a:solidFill>
+              <a:effectLst/>
+              <a:latin typeface="Charter"/>
+            </a:endParaRPr>
+          </a:p>
+          <a:p>
+            <a:r>
+              <a:rPr lang="en-US" b="0" i="0" dirty="0">
+                <a:solidFill>
+                  <a:srgbClr val="000000"/>
+                </a:solidFill>
+                <a:effectLst/>
+                <a:latin typeface="Charter"/>
+              </a:rPr>
+              <a:t>This predictability applies within the context of our homes, manifesting through the concept of organization</a:t>
+            </a:r>
+            <a:endParaRPr lang="en-PH" dirty="0"/>
+          </a:p>
+        </p:txBody>
+      </p:sp>
+      <p:sp>
+        <p:nvSpPr>
+          <p:cNvPr id="4" name="Slide Number Placeholder 3"/>
+          <p:cNvSpPr>
+            <a:spLocks noGrp="1"/>
+          </p:cNvSpPr>
+          <p:nvPr>
+            <p:ph type="sldNum" sz="quarter" idx="5"/>
+          </p:nvPr>
+        </p:nvSpPr>
+        <p:spPr/>
+        <p:txBody>
+          <a:bodyPr/>
+          <a:lstStyle/>
+          <a:p>
+            <a:fld id="{FE90CCE9-4AAE-4E1F-85AD-521A406D6524}" type="slidenum">
+              <a:rPr lang="en-PH" smtClean="0"/>
+              <a:t>7</a:t>
+            </a:fld>
+            <a:endParaRPr lang="en-PH"/>
+          </a:p>
+        </p:txBody>
+      </p:sp>
+    </p:spTree>
+    <p:extLst>
+      <p:ext uri="{BB962C8B-B14F-4D97-AF65-F5344CB8AC3E}">
+        <p14:creationId xmlns:p14="http://schemas.microsoft.com/office/powerpoint/2010/main" val="3503363003"/>
+      </p:ext>
+    </p:extLst>
+  </p:cSld>
+  <p:clrMapOvr>
+    <a:masterClrMapping/>
+  </p:clrMapOvr>
+</p:notes>
+</file>
+
+<file path=ppt/notesSlides/notesSlide8.xml><?xml version="1.0" encoding="utf-8"?>
+<p:notes xmlns:a="http://schemas.openxmlformats.org/drawingml/2006/main" xmlns:r="http://schemas.openxmlformats.org/officeDocument/2006/relationships" xmlns:p="http://schemas.openxmlformats.org/presentationml/2006/main">
+  <p:cSld>
+    <p:spTree>
+      <p:nvGrpSpPr>
+        <p:cNvPr id="1" name=""/>
+        <p:cNvGrpSpPr/>
+        <p:nvPr/>
+      </p:nvGrpSpPr>
+      <p:grpSpPr>
+        <a:xfrm>
+          <a:off x="0" y="0"/>
+          <a:ext cx="0" cy="0"/>
+          <a:chOff x="0" y="0"/>
+          <a:chExt cx="0" cy="0"/>
+        </a:xfrm>
+      </p:grpSpPr>
+      <p:sp>
+        <p:nvSpPr>
+          <p:cNvPr id="2" name="Slide Image Placeholder 1"/>
+          <p:cNvSpPr>
+            <a:spLocks noGrp="1" noRot="1" noChangeAspect="1"/>
+          </p:cNvSpPr>
+          <p:nvPr>
+            <p:ph type="sldImg"/>
+          </p:nvPr>
+        </p:nvSpPr>
+        <p:spPr/>
+      </p:sp>
+      <p:sp>
+        <p:nvSpPr>
+          <p:cNvPr id="3" name="Notes Placeholder 2"/>
+          <p:cNvSpPr>
+            <a:spLocks noGrp="1"/>
+          </p:cNvSpPr>
+          <p:nvPr>
+            <p:ph type="body" idx="1"/>
+          </p:nvPr>
+        </p:nvSpPr>
+        <p:spPr/>
+        <p:txBody>
+          <a:bodyPr/>
+          <a:lstStyle/>
+          <a:p>
+            <a:r>
+              <a:rPr lang="en-US" b="0" i="0" dirty="0">
+                <a:solidFill>
+                  <a:srgbClr val="000000"/>
+                </a:solidFill>
+                <a:effectLst/>
+                <a:latin typeface="Charter"/>
+              </a:rPr>
+              <a:t>Have you asked yourself the question, why do people organize?</a:t>
+            </a:r>
+          </a:p>
+          <a:p>
+            <a:endParaRPr lang="en-US" b="0" i="0" dirty="0">
+              <a:solidFill>
+                <a:srgbClr val="000000"/>
+              </a:solidFill>
+              <a:effectLst/>
+              <a:latin typeface="Charter"/>
+            </a:endParaRPr>
+          </a:p>
+          <a:p>
+            <a:r>
+              <a:rPr lang="en-US" b="0" i="0" dirty="0">
+                <a:solidFill>
+                  <a:srgbClr val="000000"/>
+                </a:solidFill>
+                <a:effectLst/>
+                <a:latin typeface="Charter"/>
+              </a:rPr>
+              <a:t>Lets go to the psychology of organizing</a:t>
+            </a:r>
+          </a:p>
+          <a:p>
+            <a:endParaRPr lang="en-US" b="0" i="0" dirty="0">
+              <a:solidFill>
+                <a:srgbClr val="000000"/>
+              </a:solidFill>
+              <a:effectLst/>
+              <a:latin typeface="Charter"/>
+            </a:endParaRPr>
+          </a:p>
+          <a:p>
+            <a:r>
+              <a:rPr lang="en-US" b="0" i="0" dirty="0">
+                <a:solidFill>
+                  <a:srgbClr val="000000"/>
+                </a:solidFill>
+                <a:effectLst/>
+                <a:latin typeface="Charter"/>
+              </a:rPr>
+              <a:t>This predictability applies within the context of our homes, manifesting through the concept of organization</a:t>
+            </a:r>
+            <a:endParaRPr lang="en-PH" dirty="0"/>
+          </a:p>
+        </p:txBody>
+      </p:sp>
+      <p:sp>
+        <p:nvSpPr>
+          <p:cNvPr id="4" name="Slide Number Placeholder 3"/>
+          <p:cNvSpPr>
+            <a:spLocks noGrp="1"/>
+          </p:cNvSpPr>
+          <p:nvPr>
+            <p:ph type="sldNum" sz="quarter" idx="5"/>
+          </p:nvPr>
+        </p:nvSpPr>
+        <p:spPr/>
+        <p:txBody>
+          <a:bodyPr/>
+          <a:lstStyle/>
+          <a:p>
+            <a:fld id="{FE90CCE9-4AAE-4E1F-85AD-521A406D6524}" type="slidenum">
+              <a:rPr lang="en-PH" smtClean="0"/>
+              <a:t>8</a:t>
+            </a:fld>
+            <a:endParaRPr lang="en-PH"/>
+          </a:p>
+        </p:txBody>
+      </p:sp>
+    </p:spTree>
+    <p:extLst>
+      <p:ext uri="{BB962C8B-B14F-4D97-AF65-F5344CB8AC3E}">
+        <p14:creationId xmlns:p14="http://schemas.microsoft.com/office/powerpoint/2010/main" val="553170535"/>
+      </p:ext>
+    </p:extLst>
+  </p:cSld>
+  <p:clrMapOvr>
+    <a:masterClrMapping/>
+  </p:clrMapOvr>
+</p:notes>
+</file>
+
+<file path=ppt/notesSlides/notesSlide9.xml><?xml version="1.0" encoding="utf-8"?>
+<p:notes xmlns:a="http://schemas.openxmlformats.org/drawingml/2006/main" xmlns:r="http://schemas.openxmlformats.org/officeDocument/2006/relationships" xmlns:p="http://schemas.openxmlformats.org/presentationml/2006/main">
+  <p:cSld>
+    <p:spTree>
+      <p:nvGrpSpPr>
+        <p:cNvPr id="1" name=""/>
+        <p:cNvGrpSpPr/>
+        <p:nvPr/>
+      </p:nvGrpSpPr>
+      <p:grpSpPr>
+        <a:xfrm>
+          <a:off x="0" y="0"/>
+          <a:ext cx="0" cy="0"/>
+          <a:chOff x="0" y="0"/>
+          <a:chExt cx="0" cy="0"/>
+        </a:xfrm>
+      </p:grpSpPr>
+      <p:sp>
+        <p:nvSpPr>
+          <p:cNvPr id="2" name="Slide Image Placeholder 1"/>
+          <p:cNvSpPr>
+            <a:spLocks noGrp="1" noRot="1" noChangeAspect="1"/>
+          </p:cNvSpPr>
+          <p:nvPr>
+            <p:ph type="sldImg"/>
+          </p:nvPr>
+        </p:nvSpPr>
+        <p:spPr/>
+      </p:sp>
+      <p:sp>
+        <p:nvSpPr>
+          <p:cNvPr id="3" name="Notes Placeholder 2"/>
+          <p:cNvSpPr>
+            <a:spLocks noGrp="1"/>
+          </p:cNvSpPr>
+          <p:nvPr>
+            <p:ph type="body" idx="1"/>
+          </p:nvPr>
+        </p:nvSpPr>
+        <p:spPr/>
+        <p:txBody>
+          <a:bodyPr/>
+          <a:lstStyle/>
+          <a:p>
+            <a:r>
+              <a:rPr lang="en-US" b="0" i="0" dirty="0">
+                <a:solidFill>
+                  <a:srgbClr val="000000"/>
+                </a:solidFill>
+                <a:effectLst/>
+                <a:latin typeface="Charter"/>
+              </a:rPr>
+              <a:t>Have you asked yourself the question, why do people organize?</a:t>
+            </a:r>
+          </a:p>
+          <a:p>
+            <a:endParaRPr lang="en-US" b="0" i="0" dirty="0">
+              <a:solidFill>
+                <a:srgbClr val="000000"/>
+              </a:solidFill>
+              <a:effectLst/>
+              <a:latin typeface="Charter"/>
+            </a:endParaRPr>
+          </a:p>
+          <a:p>
+            <a:r>
+              <a:rPr lang="en-US" b="0" i="0" dirty="0">
+                <a:solidFill>
+                  <a:srgbClr val="000000"/>
+                </a:solidFill>
+                <a:effectLst/>
+                <a:latin typeface="Charter"/>
+              </a:rPr>
+              <a:t>Lets go to the psychology of organizing</a:t>
+            </a:r>
+          </a:p>
+          <a:p>
+            <a:endParaRPr lang="en-US" b="0" i="0" dirty="0">
+              <a:solidFill>
+                <a:srgbClr val="000000"/>
+              </a:solidFill>
+              <a:effectLst/>
+              <a:latin typeface="Charter"/>
+            </a:endParaRPr>
+          </a:p>
+          <a:p>
+            <a:r>
+              <a:rPr lang="en-US" b="0" i="0" dirty="0">
+                <a:solidFill>
+                  <a:srgbClr val="000000"/>
+                </a:solidFill>
+                <a:effectLst/>
+                <a:latin typeface="Charter"/>
+              </a:rPr>
+              <a:t>This predictability applies within the context of our homes, manifesting through the concept of organization</a:t>
+            </a:r>
+            <a:endParaRPr lang="en-PH" dirty="0"/>
+          </a:p>
+        </p:txBody>
+      </p:sp>
+      <p:sp>
+        <p:nvSpPr>
+          <p:cNvPr id="4" name="Slide Number Placeholder 3"/>
+          <p:cNvSpPr>
+            <a:spLocks noGrp="1"/>
+          </p:cNvSpPr>
+          <p:nvPr>
+            <p:ph type="sldNum" sz="quarter" idx="5"/>
+          </p:nvPr>
+        </p:nvSpPr>
+        <p:spPr/>
+        <p:txBody>
+          <a:bodyPr/>
+          <a:lstStyle/>
+          <a:p>
+            <a:fld id="{FE90CCE9-4AAE-4E1F-85AD-521A406D6524}" type="slidenum">
+              <a:rPr lang="en-PH" smtClean="0"/>
+              <a:t>9</a:t>
+            </a:fld>
+            <a:endParaRPr lang="en-PH"/>
+          </a:p>
+        </p:txBody>
+      </p:sp>
+    </p:spTree>
+    <p:extLst>
+      <p:ext uri="{BB962C8B-B14F-4D97-AF65-F5344CB8AC3E}">
         <p14:creationId xmlns:p14="http://schemas.microsoft.com/office/powerpoint/2010/main" val="2455097254"/>
       </p:ext>
     </p:extLst>
@@ -1443,7 +1926,7 @@
           <a:p>
             <a:fld id="{0CCF0B81-6BD8-4C65-9459-815598C5F1F4}" type="datetimeFigureOut">
               <a:rPr lang="en-PH" smtClean="0"/>
-              <a:t>11/05/2026</a:t>
+              <a:t>12/05/2026</a:t>
             </a:fld>
             <a:endParaRPr lang="en-PH"/>
           </a:p>
@@ -1643,7 +2126,7 @@
           <a:p>
             <a:fld id="{0CCF0B81-6BD8-4C65-9459-815598C5F1F4}" type="datetimeFigureOut">
               <a:rPr lang="en-PH" smtClean="0"/>
-              <a:t>11/05/2026</a:t>
+              <a:t>12/05/2026</a:t>
             </a:fld>
             <a:endParaRPr lang="en-PH"/>
           </a:p>
@@ -1853,7 +2336,7 @@
           <a:p>
             <a:fld id="{0CCF0B81-6BD8-4C65-9459-815598C5F1F4}" type="datetimeFigureOut">
               <a:rPr lang="en-PH" smtClean="0"/>
-              <a:t>11/05/2026</a:t>
+              <a:t>12/05/2026</a:t>
             </a:fld>
             <a:endParaRPr lang="en-PH"/>
           </a:p>
@@ -2053,7 +2536,7 @@
           <a:p>
             <a:fld id="{0CCF0B81-6BD8-4C65-9459-815598C5F1F4}" type="datetimeFigureOut">
               <a:rPr lang="en-PH" smtClean="0"/>
-              <a:t>11/05/2026</a:t>
+              <a:t>12/05/2026</a:t>
             </a:fld>
             <a:endParaRPr lang="en-PH"/>
           </a:p>
@@ -2329,7 +2812,7 @@
           <a:p>
             <a:fld id="{0CCF0B81-6BD8-4C65-9459-815598C5F1F4}" type="datetimeFigureOut">
               <a:rPr lang="en-PH" smtClean="0"/>
-              <a:t>11/05/2026</a:t>
+              <a:t>12/05/2026</a:t>
             </a:fld>
             <a:endParaRPr lang="en-PH"/>
           </a:p>
@@ -2597,7 +3080,7 @@
           <a:p>
             <a:fld id="{0CCF0B81-6BD8-4C65-9459-815598C5F1F4}" type="datetimeFigureOut">
               <a:rPr lang="en-PH" smtClean="0"/>
-              <a:t>11/05/2026</a:t>
+              <a:t>12/05/2026</a:t>
             </a:fld>
             <a:endParaRPr lang="en-PH"/>
           </a:p>
@@ -3012,7 +3495,7 @@
           <a:p>
             <a:fld id="{0CCF0B81-6BD8-4C65-9459-815598C5F1F4}" type="datetimeFigureOut">
               <a:rPr lang="en-PH" smtClean="0"/>
-              <a:t>11/05/2026</a:t>
+              <a:t>12/05/2026</a:t>
             </a:fld>
             <a:endParaRPr lang="en-PH"/>
           </a:p>
@@ -3154,7 +3637,7 @@
           <a:p>
             <a:fld id="{0CCF0B81-6BD8-4C65-9459-815598C5F1F4}" type="datetimeFigureOut">
               <a:rPr lang="en-PH" smtClean="0"/>
-              <a:t>11/05/2026</a:t>
+              <a:t>12/05/2026</a:t>
             </a:fld>
             <a:endParaRPr lang="en-PH"/>
           </a:p>
@@ -3267,7 +3750,7 @@
           <a:p>
             <a:fld id="{0CCF0B81-6BD8-4C65-9459-815598C5F1F4}" type="datetimeFigureOut">
               <a:rPr lang="en-PH" smtClean="0"/>
-              <a:t>11/05/2026</a:t>
+              <a:t>12/05/2026</a:t>
             </a:fld>
             <a:endParaRPr lang="en-PH"/>
           </a:p>
@@ -3580,7 +4063,7 @@
           <a:p>
             <a:fld id="{0CCF0B81-6BD8-4C65-9459-815598C5F1F4}" type="datetimeFigureOut">
               <a:rPr lang="en-PH" smtClean="0"/>
-              <a:t>11/05/2026</a:t>
+              <a:t>12/05/2026</a:t>
             </a:fld>
             <a:endParaRPr lang="en-PH"/>
           </a:p>
@@ -3869,7 +4352,7 @@
           <a:p>
             <a:fld id="{0CCF0B81-6BD8-4C65-9459-815598C5F1F4}" type="datetimeFigureOut">
               <a:rPr lang="en-PH" smtClean="0"/>
-              <a:t>11/05/2026</a:t>
+              <a:t>12/05/2026</a:t>
             </a:fld>
             <a:endParaRPr lang="en-PH"/>
           </a:p>
@@ -4112,7 +4595,7 @@
           <a:p>
             <a:fld id="{0CCF0B81-6BD8-4C65-9459-815598C5F1F4}" type="datetimeFigureOut">
               <a:rPr lang="en-PH" smtClean="0"/>
-              <a:t>11/05/2026</a:t>
+              <a:t>12/05/2026</a:t>
             </a:fld>
             <a:endParaRPr lang="en-PH"/>
           </a:p>
@@ -4537,6 +5020,3531 @@
           <a:chExt cx="0" cy="0"/>
         </a:xfrm>
       </p:grpSpPr>
+      <p:graphicFrame>
+        <p:nvGraphicFramePr>
+          <p:cNvPr id="31" name="Table 31">
+            <a:extLst>
+              <a:ext uri="{FF2B5EF4-FFF2-40B4-BE49-F238E27FC236}">
+                <a16:creationId xmlns:a16="http://schemas.microsoft.com/office/drawing/2014/main" id="{3EDA3525-D1AC-4B39-4628-DE727256DAB8}"/>
+              </a:ext>
+            </a:extLst>
+          </p:cNvPr>
+          <p:cNvGraphicFramePr>
+            <a:graphicFrameLocks noGrp="1"/>
+          </p:cNvGraphicFramePr>
+          <p:nvPr>
+            <p:extLst>
+              <p:ext uri="{D42A27DB-BD31-4B8C-83A1-F6EECF244321}">
+                <p14:modId xmlns:p14="http://schemas.microsoft.com/office/powerpoint/2010/main" val="2797905217"/>
+              </p:ext>
+            </p:extLst>
+          </p:nvPr>
+        </p:nvGraphicFramePr>
+        <p:xfrm>
+          <a:off x="5021592" y="2278106"/>
+          <a:ext cx="2037080" cy="2348116"/>
+        </p:xfrm>
+        <a:graphic>
+          <a:graphicData uri="http://schemas.openxmlformats.org/drawingml/2006/table">
+            <a:tbl>
+              <a:tblPr firstRow="1" bandRow="1">
+                <a:tableStyleId>{5940675A-B579-460E-94D1-54222C63F5DA}</a:tableStyleId>
+              </a:tblPr>
+              <a:tblGrid>
+                <a:gridCol w="2037080">
+                  <a:extLst>
+                    <a:ext uri="{9D8B030D-6E8A-4147-A177-3AD203B41FA5}">
+                      <a16:colId xmlns:a16="http://schemas.microsoft.com/office/drawing/2014/main" val="1867406527"/>
+                    </a:ext>
+                  </a:extLst>
+                </a:gridCol>
+              </a:tblGrid>
+              <a:tr h="587029">
+                <a:tc>
+                  <a:txBody>
+                    <a:bodyPr/>
+                    <a:lstStyle/>
+                    <a:p>
+                      <a:pPr algn="ctr"/>
+                      <a:endParaRPr lang="en-PH" dirty="0"/>
+                    </a:p>
+                  </a:txBody>
+                  <a:tcPr>
+                    <a:lnL w="12700" cap="flat" cmpd="sng" algn="ctr">
+                      <a:solidFill>
+                        <a:srgbClr val="00B050"/>
+                      </a:solidFill>
+                      <a:prstDash val="solid"/>
+                      <a:round/>
+                      <a:headEnd type="none" w="med" len="med"/>
+                      <a:tailEnd type="none" w="med" len="med"/>
+                    </a:lnL>
+                    <a:lnR w="12700" cap="flat" cmpd="sng" algn="ctr">
+                      <a:solidFill>
+                        <a:srgbClr val="00B050"/>
+                      </a:solidFill>
+                      <a:prstDash val="solid"/>
+                      <a:round/>
+                      <a:headEnd type="none" w="med" len="med"/>
+                      <a:tailEnd type="none" w="med" len="med"/>
+                    </a:lnR>
+                    <a:lnT w="12700" cap="flat" cmpd="sng" algn="ctr">
+                      <a:solidFill>
+                        <a:srgbClr val="00B050"/>
+                      </a:solidFill>
+                      <a:prstDash val="solid"/>
+                      <a:round/>
+                      <a:headEnd type="none" w="med" len="med"/>
+                      <a:tailEnd type="none" w="med" len="med"/>
+                    </a:lnT>
+                    <a:lnB w="12700" cap="flat" cmpd="sng" algn="ctr">
+                      <a:solidFill>
+                        <a:srgbClr val="00B050"/>
+                      </a:solidFill>
+                      <a:prstDash val="solid"/>
+                      <a:round/>
+                      <a:headEnd type="none" w="med" len="med"/>
+                      <a:tailEnd type="none" w="med" len="med"/>
+                    </a:lnB>
+                  </a:tcPr>
+                </a:tc>
+                <a:extLst>
+                  <a:ext uri="{0D108BD9-81ED-4DB2-BD59-A6C34878D82A}">
+                    <a16:rowId xmlns:a16="http://schemas.microsoft.com/office/drawing/2014/main" val="2897862470"/>
+                  </a:ext>
+                </a:extLst>
+              </a:tr>
+              <a:tr h="587029">
+                <a:tc>
+                  <a:txBody>
+                    <a:bodyPr/>
+                    <a:lstStyle/>
+                    <a:p>
+                      <a:pPr algn="ctr"/>
+                      <a:endParaRPr lang="en-PH" dirty="0"/>
+                    </a:p>
+                  </a:txBody>
+                  <a:tcPr>
+                    <a:lnL w="12700" cap="flat" cmpd="sng" algn="ctr">
+                      <a:solidFill>
+                        <a:srgbClr val="00B050"/>
+                      </a:solidFill>
+                      <a:prstDash val="solid"/>
+                      <a:round/>
+                      <a:headEnd type="none" w="med" len="med"/>
+                      <a:tailEnd type="none" w="med" len="med"/>
+                    </a:lnL>
+                    <a:lnR w="12700" cap="flat" cmpd="sng" algn="ctr">
+                      <a:solidFill>
+                        <a:srgbClr val="00B050"/>
+                      </a:solidFill>
+                      <a:prstDash val="solid"/>
+                      <a:round/>
+                      <a:headEnd type="none" w="med" len="med"/>
+                      <a:tailEnd type="none" w="med" len="med"/>
+                    </a:lnR>
+                    <a:lnT w="12700" cap="flat" cmpd="sng" algn="ctr">
+                      <a:solidFill>
+                        <a:srgbClr val="00B050"/>
+                      </a:solidFill>
+                      <a:prstDash val="solid"/>
+                      <a:round/>
+                      <a:headEnd type="none" w="med" len="med"/>
+                      <a:tailEnd type="none" w="med" len="med"/>
+                    </a:lnT>
+                    <a:lnB w="12700" cap="flat" cmpd="sng" algn="ctr">
+                      <a:solidFill>
+                        <a:srgbClr val="00B050"/>
+                      </a:solidFill>
+                      <a:prstDash val="solid"/>
+                      <a:round/>
+                      <a:headEnd type="none" w="med" len="med"/>
+                      <a:tailEnd type="none" w="med" len="med"/>
+                    </a:lnB>
+                  </a:tcPr>
+                </a:tc>
+                <a:extLst>
+                  <a:ext uri="{0D108BD9-81ED-4DB2-BD59-A6C34878D82A}">
+                    <a16:rowId xmlns:a16="http://schemas.microsoft.com/office/drawing/2014/main" val="3239772172"/>
+                  </a:ext>
+                </a:extLst>
+              </a:tr>
+              <a:tr h="587029">
+                <a:tc>
+                  <a:txBody>
+                    <a:bodyPr/>
+                    <a:lstStyle/>
+                    <a:p>
+                      <a:pPr algn="ctr"/>
+                      <a:endParaRPr lang="en-PH" dirty="0"/>
+                    </a:p>
+                  </a:txBody>
+                  <a:tcPr>
+                    <a:lnL w="12700" cap="flat" cmpd="sng" algn="ctr">
+                      <a:solidFill>
+                        <a:srgbClr val="00B050"/>
+                      </a:solidFill>
+                      <a:prstDash val="solid"/>
+                      <a:round/>
+                      <a:headEnd type="none" w="med" len="med"/>
+                      <a:tailEnd type="none" w="med" len="med"/>
+                    </a:lnL>
+                    <a:lnR w="12700" cap="flat" cmpd="sng" algn="ctr">
+                      <a:solidFill>
+                        <a:srgbClr val="00B050"/>
+                      </a:solidFill>
+                      <a:prstDash val="solid"/>
+                      <a:round/>
+                      <a:headEnd type="none" w="med" len="med"/>
+                      <a:tailEnd type="none" w="med" len="med"/>
+                    </a:lnR>
+                    <a:lnT w="12700" cap="flat" cmpd="sng" algn="ctr">
+                      <a:solidFill>
+                        <a:srgbClr val="00B050"/>
+                      </a:solidFill>
+                      <a:prstDash val="solid"/>
+                      <a:round/>
+                      <a:headEnd type="none" w="med" len="med"/>
+                      <a:tailEnd type="none" w="med" len="med"/>
+                    </a:lnT>
+                    <a:lnB w="12700" cap="flat" cmpd="sng" algn="ctr">
+                      <a:solidFill>
+                        <a:srgbClr val="00B050"/>
+                      </a:solidFill>
+                      <a:prstDash val="solid"/>
+                      <a:round/>
+                      <a:headEnd type="none" w="med" len="med"/>
+                      <a:tailEnd type="none" w="med" len="med"/>
+                    </a:lnB>
+                  </a:tcPr>
+                </a:tc>
+                <a:extLst>
+                  <a:ext uri="{0D108BD9-81ED-4DB2-BD59-A6C34878D82A}">
+                    <a16:rowId xmlns:a16="http://schemas.microsoft.com/office/drawing/2014/main" val="3782862954"/>
+                  </a:ext>
+                </a:extLst>
+              </a:tr>
+              <a:tr h="587029">
+                <a:tc>
+                  <a:txBody>
+                    <a:bodyPr/>
+                    <a:lstStyle/>
+                    <a:p>
+                      <a:pPr algn="ctr"/>
+                      <a:endParaRPr lang="en-PH" dirty="0"/>
+                    </a:p>
+                  </a:txBody>
+                  <a:tcPr>
+                    <a:lnL w="12700" cap="flat" cmpd="sng" algn="ctr">
+                      <a:solidFill>
+                        <a:srgbClr val="00B050"/>
+                      </a:solidFill>
+                      <a:prstDash val="solid"/>
+                      <a:round/>
+                      <a:headEnd type="none" w="med" len="med"/>
+                      <a:tailEnd type="none" w="med" len="med"/>
+                    </a:lnL>
+                    <a:lnR w="12700" cap="flat" cmpd="sng" algn="ctr">
+                      <a:solidFill>
+                        <a:srgbClr val="00B050"/>
+                      </a:solidFill>
+                      <a:prstDash val="solid"/>
+                      <a:round/>
+                      <a:headEnd type="none" w="med" len="med"/>
+                      <a:tailEnd type="none" w="med" len="med"/>
+                    </a:lnR>
+                    <a:lnT w="12700" cap="flat" cmpd="sng" algn="ctr">
+                      <a:solidFill>
+                        <a:srgbClr val="00B050"/>
+                      </a:solidFill>
+                      <a:prstDash val="solid"/>
+                      <a:round/>
+                      <a:headEnd type="none" w="med" len="med"/>
+                      <a:tailEnd type="none" w="med" len="med"/>
+                    </a:lnT>
+                    <a:lnB w="12700" cap="flat" cmpd="sng" algn="ctr">
+                      <a:solidFill>
+                        <a:srgbClr val="00B050"/>
+                      </a:solidFill>
+                      <a:prstDash val="solid"/>
+                      <a:round/>
+                      <a:headEnd type="none" w="med" len="med"/>
+                      <a:tailEnd type="none" w="med" len="med"/>
+                    </a:lnB>
+                  </a:tcPr>
+                </a:tc>
+                <a:extLst>
+                  <a:ext uri="{0D108BD9-81ED-4DB2-BD59-A6C34878D82A}">
+                    <a16:rowId xmlns:a16="http://schemas.microsoft.com/office/drawing/2014/main" val="1516599522"/>
+                  </a:ext>
+                </a:extLst>
+              </a:tr>
+            </a:tbl>
+          </a:graphicData>
+        </a:graphic>
+      </p:graphicFrame>
+      <p:pic>
+        <p:nvPicPr>
+          <p:cNvPr id="19" name="Picture 18">
+            <a:extLst>
+              <a:ext uri="{FF2B5EF4-FFF2-40B4-BE49-F238E27FC236}">
+                <a16:creationId xmlns:a16="http://schemas.microsoft.com/office/drawing/2014/main" id="{E69FB9D7-1D76-44ED-1581-92874D881BAC}"/>
+              </a:ext>
+            </a:extLst>
+          </p:cNvPr>
+          <p:cNvPicPr>
+            <a:picLocks noChangeAspect="1"/>
+          </p:cNvPicPr>
+          <p:nvPr/>
+        </p:nvPicPr>
+        <p:blipFill>
+          <a:blip r:embed="rId3">
+            <a:extLst>
+              <a:ext uri="{28A0092B-C50C-407E-A947-70E740481C1C}">
+                <a14:useLocalDpi xmlns:a14="http://schemas.microsoft.com/office/drawing/2010/main" val="0"/>
+              </a:ext>
+              <a:ext uri="{837473B0-CC2E-450A-ABE3-18F120FF3D39}">
+                <a1611:picAttrSrcUrl xmlns:a1611="http://schemas.microsoft.com/office/drawing/2016/11/main" r:id="rId4"/>
+              </a:ext>
+            </a:extLst>
+          </a:blip>
+          <a:stretch>
+            <a:fillRect/>
+          </a:stretch>
+        </p:blipFill>
+        <p:spPr>
+          <a:xfrm>
+            <a:off x="7286139" y="4080301"/>
+            <a:ext cx="545921" cy="545921"/>
+          </a:xfrm>
+          <a:prstGeom prst="rect">
+            <a:avLst/>
+          </a:prstGeom>
+        </p:spPr>
+      </p:pic>
+      <p:sp>
+        <p:nvSpPr>
+          <p:cNvPr id="35" name="TextBox 34">
+            <a:extLst>
+              <a:ext uri="{FF2B5EF4-FFF2-40B4-BE49-F238E27FC236}">
+                <a16:creationId xmlns:a16="http://schemas.microsoft.com/office/drawing/2014/main" id="{B33FBCC3-4573-0F0F-8EC2-7D331720FD53}"/>
+              </a:ext>
+            </a:extLst>
+          </p:cNvPr>
+          <p:cNvSpPr txBox="1"/>
+          <p:nvPr/>
+        </p:nvSpPr>
+        <p:spPr>
+          <a:xfrm>
+            <a:off x="5462282" y="4117982"/>
+            <a:ext cx="1155700" cy="369332"/>
+          </a:xfrm>
+          <a:prstGeom prst="rect">
+            <a:avLst/>
+          </a:prstGeom>
+          <a:noFill/>
+        </p:spPr>
+        <p:txBody>
+          <a:bodyPr wrap="square" rtlCol="0">
+            <a:spAutoFit/>
+          </a:bodyPr>
+          <a:lstStyle/>
+          <a:p>
+            <a:r>
+              <a:rPr lang="en-PH" b="1" dirty="0">
+                <a:solidFill>
+                  <a:srgbClr val="00B050"/>
+                </a:solidFill>
+              </a:rPr>
+              <a:t>Blue Shirt</a:t>
+            </a:r>
+          </a:p>
+        </p:txBody>
+      </p:sp>
+      <p:pic>
+        <p:nvPicPr>
+          <p:cNvPr id="17" name="Picture 16" descr="A picture containing shirt&#10;&#10;Description automatically generated">
+            <a:extLst>
+              <a:ext uri="{FF2B5EF4-FFF2-40B4-BE49-F238E27FC236}">
+                <a16:creationId xmlns:a16="http://schemas.microsoft.com/office/drawing/2014/main" id="{CBC0D990-F61C-886D-0174-0C9734DFFE8B}"/>
+              </a:ext>
+            </a:extLst>
+          </p:cNvPr>
+          <p:cNvPicPr>
+            <a:picLocks noChangeAspect="1"/>
+          </p:cNvPicPr>
+          <p:nvPr/>
+        </p:nvPicPr>
+        <p:blipFill>
+          <a:blip r:embed="rId5">
+            <a:extLst>
+              <a:ext uri="{28A0092B-C50C-407E-A947-70E740481C1C}">
+                <a14:useLocalDpi xmlns:a14="http://schemas.microsoft.com/office/drawing/2010/main" val="0"/>
+              </a:ext>
+              <a:ext uri="{837473B0-CC2E-450A-ABE3-18F120FF3D39}">
+                <a1611:picAttrSrcUrl xmlns:a1611="http://schemas.microsoft.com/office/drawing/2016/11/main" r:id="rId6"/>
+              </a:ext>
+            </a:extLst>
+          </a:blip>
+          <a:stretch>
+            <a:fillRect/>
+          </a:stretch>
+        </p:blipFill>
+        <p:spPr>
+          <a:xfrm>
+            <a:off x="7271407" y="3481007"/>
+            <a:ext cx="545921" cy="539180"/>
+          </a:xfrm>
+          <a:prstGeom prst="rect">
+            <a:avLst/>
+          </a:prstGeom>
+        </p:spPr>
+      </p:pic>
+      <p:sp>
+        <p:nvSpPr>
+          <p:cNvPr id="37" name="TextBox 36">
+            <a:extLst>
+              <a:ext uri="{FF2B5EF4-FFF2-40B4-BE49-F238E27FC236}">
+                <a16:creationId xmlns:a16="http://schemas.microsoft.com/office/drawing/2014/main" id="{77D901AC-4A5F-0473-6B23-69F7558EE895}"/>
+              </a:ext>
+            </a:extLst>
+          </p:cNvPr>
+          <p:cNvSpPr txBox="1"/>
+          <p:nvPr/>
+        </p:nvSpPr>
+        <p:spPr>
+          <a:xfrm>
+            <a:off x="5462282" y="3530376"/>
+            <a:ext cx="1155700" cy="369332"/>
+          </a:xfrm>
+          <a:prstGeom prst="rect">
+            <a:avLst/>
+          </a:prstGeom>
+          <a:noFill/>
+        </p:spPr>
+        <p:txBody>
+          <a:bodyPr wrap="square" rtlCol="0">
+            <a:spAutoFit/>
+          </a:bodyPr>
+          <a:lstStyle/>
+          <a:p>
+            <a:r>
+              <a:rPr lang="en-PH" b="1" dirty="0">
+                <a:solidFill>
+                  <a:srgbClr val="00B050"/>
+                </a:solidFill>
+              </a:rPr>
+              <a:t>Red Shirt</a:t>
+            </a:r>
+          </a:p>
+        </p:txBody>
+      </p:sp>
+      <p:pic>
+        <p:nvPicPr>
+          <p:cNvPr id="26" name="Picture 25" descr="Diagram&#10;&#10;Description automatically generated with low confidence">
+            <a:extLst>
+              <a:ext uri="{FF2B5EF4-FFF2-40B4-BE49-F238E27FC236}">
+                <a16:creationId xmlns:a16="http://schemas.microsoft.com/office/drawing/2014/main" id="{224C7777-5A04-AE76-6E42-09F1556BA93B}"/>
+              </a:ext>
+            </a:extLst>
+          </p:cNvPr>
+          <p:cNvPicPr>
+            <a:picLocks noChangeAspect="1"/>
+          </p:cNvPicPr>
+          <p:nvPr/>
+        </p:nvPicPr>
+        <p:blipFill>
+          <a:blip r:embed="rId7">
+            <a:extLst>
+              <a:ext uri="{28A0092B-C50C-407E-A947-70E740481C1C}">
+                <a14:useLocalDpi xmlns:a14="http://schemas.microsoft.com/office/drawing/2010/main" val="0"/>
+              </a:ext>
+              <a:ext uri="{837473B0-CC2E-450A-ABE3-18F120FF3D39}">
+                <a1611:picAttrSrcUrl xmlns:a1611="http://schemas.microsoft.com/office/drawing/2016/11/main" r:id="rId8"/>
+              </a:ext>
+            </a:extLst>
+          </a:blip>
+          <a:stretch>
+            <a:fillRect/>
+          </a:stretch>
+        </p:blipFill>
+        <p:spPr>
+          <a:xfrm>
+            <a:off x="7271407" y="2874972"/>
+            <a:ext cx="545921" cy="545921"/>
+          </a:xfrm>
+          <a:prstGeom prst="rect">
+            <a:avLst/>
+          </a:prstGeom>
+        </p:spPr>
+      </p:pic>
+      <p:sp>
+        <p:nvSpPr>
+          <p:cNvPr id="38" name="TextBox 37">
+            <a:extLst>
+              <a:ext uri="{FF2B5EF4-FFF2-40B4-BE49-F238E27FC236}">
+                <a16:creationId xmlns:a16="http://schemas.microsoft.com/office/drawing/2014/main" id="{0CC4A1A5-8137-8664-3CCF-74C048507E63}"/>
+              </a:ext>
+            </a:extLst>
+          </p:cNvPr>
+          <p:cNvSpPr txBox="1"/>
+          <p:nvPr/>
+        </p:nvSpPr>
+        <p:spPr>
+          <a:xfrm>
+            <a:off x="5333888" y="3000168"/>
+            <a:ext cx="1417570" cy="369332"/>
+          </a:xfrm>
+          <a:prstGeom prst="rect">
+            <a:avLst/>
+          </a:prstGeom>
+          <a:noFill/>
+        </p:spPr>
+        <p:txBody>
+          <a:bodyPr wrap="square" rtlCol="0">
+            <a:spAutoFit/>
+          </a:bodyPr>
+          <a:lstStyle/>
+          <a:p>
+            <a:r>
+              <a:rPr lang="en-PH" b="1" dirty="0">
+                <a:solidFill>
+                  <a:srgbClr val="00B050"/>
+                </a:solidFill>
+              </a:rPr>
+              <a:t>Yellow Shirt</a:t>
+            </a:r>
+          </a:p>
+        </p:txBody>
+      </p:sp>
+      <p:pic>
+        <p:nvPicPr>
+          <p:cNvPr id="24" name="Picture 23" descr="Diagram&#10;&#10;Description automatically generated">
+            <a:extLst>
+              <a:ext uri="{FF2B5EF4-FFF2-40B4-BE49-F238E27FC236}">
+                <a16:creationId xmlns:a16="http://schemas.microsoft.com/office/drawing/2014/main" id="{E7805405-62A9-D8B6-F101-E4F92391F410}"/>
+              </a:ext>
+            </a:extLst>
+          </p:cNvPr>
+          <p:cNvPicPr>
+            <a:picLocks noChangeAspect="1"/>
+          </p:cNvPicPr>
+          <p:nvPr/>
+        </p:nvPicPr>
+        <p:blipFill>
+          <a:blip r:embed="rId9">
+            <a:extLst>
+              <a:ext uri="{28A0092B-C50C-407E-A947-70E740481C1C}">
+                <a14:useLocalDpi xmlns:a14="http://schemas.microsoft.com/office/drawing/2010/main" val="0"/>
+              </a:ext>
+              <a:ext uri="{837473B0-CC2E-450A-ABE3-18F120FF3D39}">
+                <a1611:picAttrSrcUrl xmlns:a1611="http://schemas.microsoft.com/office/drawing/2016/11/main" r:id="rId10"/>
+              </a:ext>
+            </a:extLst>
+          </a:blip>
+          <a:stretch>
+            <a:fillRect/>
+          </a:stretch>
+        </p:blipFill>
+        <p:spPr>
+          <a:xfrm>
+            <a:off x="7308773" y="2254942"/>
+            <a:ext cx="500655" cy="545921"/>
+          </a:xfrm>
+          <a:prstGeom prst="rect">
+            <a:avLst/>
+          </a:prstGeom>
+        </p:spPr>
+      </p:pic>
+      <p:sp>
+        <p:nvSpPr>
+          <p:cNvPr id="41" name="TextBox 40">
+            <a:extLst>
+              <a:ext uri="{FF2B5EF4-FFF2-40B4-BE49-F238E27FC236}">
+                <a16:creationId xmlns:a16="http://schemas.microsoft.com/office/drawing/2014/main" id="{6E9802A0-DC44-241F-7C09-E15160BA19C1}"/>
+              </a:ext>
+            </a:extLst>
+          </p:cNvPr>
+          <p:cNvSpPr txBox="1"/>
+          <p:nvPr/>
+        </p:nvSpPr>
+        <p:spPr>
+          <a:xfrm>
+            <a:off x="5344055" y="2405334"/>
+            <a:ext cx="1417570" cy="369332"/>
+          </a:xfrm>
+          <a:prstGeom prst="rect">
+            <a:avLst/>
+          </a:prstGeom>
+          <a:noFill/>
+        </p:spPr>
+        <p:txBody>
+          <a:bodyPr wrap="square" rtlCol="0">
+            <a:spAutoFit/>
+          </a:bodyPr>
+          <a:lstStyle/>
+          <a:p>
+            <a:r>
+              <a:rPr lang="en-PH" b="1" dirty="0">
+                <a:solidFill>
+                  <a:srgbClr val="00B050"/>
+                </a:solidFill>
+              </a:rPr>
+              <a:t>Green Shirt</a:t>
+            </a:r>
+          </a:p>
+        </p:txBody>
+      </p:sp>
+      <p:sp>
+        <p:nvSpPr>
+          <p:cNvPr id="5" name="Title 1">
+            <a:extLst>
+              <a:ext uri="{FF2B5EF4-FFF2-40B4-BE49-F238E27FC236}">
+                <a16:creationId xmlns:a16="http://schemas.microsoft.com/office/drawing/2014/main" id="{D359A545-5E0C-E6E5-274C-D470E99B10C7}"/>
+              </a:ext>
+            </a:extLst>
+          </p:cNvPr>
+          <p:cNvSpPr>
+            <a:spLocks noGrp="1"/>
+          </p:cNvSpPr>
+          <p:nvPr>
+            <p:ph type="ctrTitle"/>
+          </p:nvPr>
+        </p:nvSpPr>
+        <p:spPr>
+          <a:xfrm>
+            <a:off x="1524000" y="497150"/>
+            <a:ext cx="9144000" cy="718459"/>
+          </a:xfrm>
+        </p:spPr>
+        <p:txBody>
+          <a:bodyPr>
+            <a:normAutofit fontScale="90000"/>
+          </a:bodyPr>
+          <a:lstStyle/>
+          <a:p>
+            <a:r>
+              <a:rPr lang="en-US" sz="6000" b="1" i="0" dirty="0">
+                <a:solidFill>
+                  <a:srgbClr val="00B050"/>
+                </a:solidFill>
+                <a:effectLst/>
+              </a:rPr>
+              <a:t>Stack</a:t>
+            </a:r>
+            <a:endParaRPr lang="en-PH" dirty="0">
+              <a:solidFill>
+                <a:srgbClr val="00B050"/>
+              </a:solidFill>
+            </a:endParaRPr>
+          </a:p>
+        </p:txBody>
+      </p:sp>
+      <p:sp>
+        <p:nvSpPr>
+          <p:cNvPr id="8" name="TextBox 7">
+            <a:extLst>
+              <a:ext uri="{FF2B5EF4-FFF2-40B4-BE49-F238E27FC236}">
+                <a16:creationId xmlns:a16="http://schemas.microsoft.com/office/drawing/2014/main" id="{4E1121B2-8C34-C723-AA30-2A804B79DD2B}"/>
+              </a:ext>
+            </a:extLst>
+          </p:cNvPr>
+          <p:cNvSpPr txBox="1"/>
+          <p:nvPr/>
+        </p:nvSpPr>
+        <p:spPr>
+          <a:xfrm>
+            <a:off x="609600" y="5372418"/>
+            <a:ext cx="10972800" cy="861774"/>
+          </a:xfrm>
+          <a:prstGeom prst="rect">
+            <a:avLst/>
+          </a:prstGeom>
+          <a:noFill/>
+        </p:spPr>
+        <p:txBody>
+          <a:bodyPr wrap="square">
+            <a:spAutoFit/>
+          </a:bodyPr>
+          <a:lstStyle/>
+          <a:p>
+            <a:pPr algn="ctr"/>
+            <a:r>
+              <a:rPr lang="en-US" sz="2500" dirty="0">
+                <a:solidFill>
+                  <a:schemeClr val="bg1"/>
+                </a:solidFill>
+              </a:rPr>
+              <a:t>A </a:t>
+            </a:r>
+            <a:r>
+              <a:rPr lang="en-US" sz="2500" b="1" dirty="0">
+                <a:solidFill>
+                  <a:schemeClr val="bg1"/>
+                </a:solidFill>
+              </a:rPr>
+              <a:t>stack</a:t>
+            </a:r>
+            <a:r>
+              <a:rPr lang="en-US" sz="2500" dirty="0">
+                <a:solidFill>
+                  <a:schemeClr val="bg1"/>
+                </a:solidFill>
+              </a:rPr>
+              <a:t> is a linear data structure that follows the principle of </a:t>
+            </a:r>
+            <a:r>
+              <a:rPr lang="en-US" sz="2500" b="1" dirty="0">
+                <a:solidFill>
+                  <a:schemeClr val="bg1"/>
+                </a:solidFill>
+              </a:rPr>
+              <a:t>Last In First Out (LIFO)</a:t>
+            </a:r>
+            <a:r>
+              <a:rPr lang="en-US" sz="2500" dirty="0">
+                <a:solidFill>
+                  <a:schemeClr val="bg1"/>
+                </a:solidFill>
+              </a:rPr>
+              <a:t>. </a:t>
+            </a:r>
+          </a:p>
+        </p:txBody>
+      </p:sp>
+    </p:spTree>
+    <p:extLst>
+      <p:ext uri="{BB962C8B-B14F-4D97-AF65-F5344CB8AC3E}">
+        <p14:creationId xmlns:p14="http://schemas.microsoft.com/office/powerpoint/2010/main" val="2301016541"/>
+      </p:ext>
+    </p:extLst>
+  </p:cSld>
+  <p:clrMapOvr>
+    <a:masterClrMapping/>
+  </p:clrMapOvr>
+</p:sld>
+</file>
+
+<file path=ppt/slides/slide2.xml><?xml version="1.0" encoding="utf-8"?>
+<p:sld xmlns:a="http://schemas.openxmlformats.org/drawingml/2006/main" xmlns:r="http://schemas.openxmlformats.org/officeDocument/2006/relationships" xmlns:p="http://schemas.openxmlformats.org/presentationml/2006/main">
+  <p:cSld>
+    <p:bg>
+      <p:bgPr>
+        <a:solidFill>
+          <a:schemeClr val="tx1"/>
+        </a:solidFill>
+        <a:effectLst/>
+      </p:bgPr>
+    </p:bg>
+    <p:spTree>
+      <p:nvGrpSpPr>
+        <p:cNvPr id="1" name="">
+          <a:extLst>
+            <a:ext uri="{FF2B5EF4-FFF2-40B4-BE49-F238E27FC236}">
+              <a16:creationId xmlns:a16="http://schemas.microsoft.com/office/drawing/2014/main" id="{91A3B2D5-63C7-5D1D-E3DC-B3FC34231018}"/>
+            </a:ext>
+          </a:extLst>
+        </p:cNvPr>
+        <p:cNvGrpSpPr/>
+        <p:nvPr/>
+      </p:nvGrpSpPr>
+      <p:grpSpPr>
+        <a:xfrm>
+          <a:off x="0" y="0"/>
+          <a:ext cx="0" cy="0"/>
+          <a:chOff x="0" y="0"/>
+          <a:chExt cx="0" cy="0"/>
+        </a:xfrm>
+      </p:grpSpPr>
+      <p:graphicFrame>
+        <p:nvGraphicFramePr>
+          <p:cNvPr id="31" name="Table 31">
+            <a:extLst>
+              <a:ext uri="{FF2B5EF4-FFF2-40B4-BE49-F238E27FC236}">
+                <a16:creationId xmlns:a16="http://schemas.microsoft.com/office/drawing/2014/main" id="{D4827599-B196-0B41-D4A9-90EEC59DBB60}"/>
+              </a:ext>
+            </a:extLst>
+          </p:cNvPr>
+          <p:cNvGraphicFramePr>
+            <a:graphicFrameLocks noGrp="1"/>
+          </p:cNvGraphicFramePr>
+          <p:nvPr/>
+        </p:nvGraphicFramePr>
+        <p:xfrm>
+          <a:off x="5021592" y="2278106"/>
+          <a:ext cx="2037080" cy="2348116"/>
+        </p:xfrm>
+        <a:graphic>
+          <a:graphicData uri="http://schemas.openxmlformats.org/drawingml/2006/table">
+            <a:tbl>
+              <a:tblPr firstRow="1" bandRow="1">
+                <a:tableStyleId>{5940675A-B579-460E-94D1-54222C63F5DA}</a:tableStyleId>
+              </a:tblPr>
+              <a:tblGrid>
+                <a:gridCol w="2037080">
+                  <a:extLst>
+                    <a:ext uri="{9D8B030D-6E8A-4147-A177-3AD203B41FA5}">
+                      <a16:colId xmlns:a16="http://schemas.microsoft.com/office/drawing/2014/main" val="1867406527"/>
+                    </a:ext>
+                  </a:extLst>
+                </a:gridCol>
+              </a:tblGrid>
+              <a:tr h="587029">
+                <a:tc>
+                  <a:txBody>
+                    <a:bodyPr/>
+                    <a:lstStyle/>
+                    <a:p>
+                      <a:pPr algn="ctr"/>
+                      <a:endParaRPr lang="en-PH" dirty="0"/>
+                    </a:p>
+                  </a:txBody>
+                  <a:tcPr>
+                    <a:lnL w="12700" cap="flat" cmpd="sng" algn="ctr">
+                      <a:solidFill>
+                        <a:srgbClr val="00B050"/>
+                      </a:solidFill>
+                      <a:prstDash val="solid"/>
+                      <a:round/>
+                      <a:headEnd type="none" w="med" len="med"/>
+                      <a:tailEnd type="none" w="med" len="med"/>
+                    </a:lnL>
+                    <a:lnR w="12700" cap="flat" cmpd="sng" algn="ctr">
+                      <a:solidFill>
+                        <a:srgbClr val="00B050"/>
+                      </a:solidFill>
+                      <a:prstDash val="solid"/>
+                      <a:round/>
+                      <a:headEnd type="none" w="med" len="med"/>
+                      <a:tailEnd type="none" w="med" len="med"/>
+                    </a:lnR>
+                    <a:lnT w="12700" cap="flat" cmpd="sng" algn="ctr">
+                      <a:solidFill>
+                        <a:srgbClr val="00B050"/>
+                      </a:solidFill>
+                      <a:prstDash val="solid"/>
+                      <a:round/>
+                      <a:headEnd type="none" w="med" len="med"/>
+                      <a:tailEnd type="none" w="med" len="med"/>
+                    </a:lnT>
+                    <a:lnB w="12700" cap="flat" cmpd="sng" algn="ctr">
+                      <a:solidFill>
+                        <a:srgbClr val="00B050"/>
+                      </a:solidFill>
+                      <a:prstDash val="solid"/>
+                      <a:round/>
+                      <a:headEnd type="none" w="med" len="med"/>
+                      <a:tailEnd type="none" w="med" len="med"/>
+                    </a:lnB>
+                  </a:tcPr>
+                </a:tc>
+                <a:extLst>
+                  <a:ext uri="{0D108BD9-81ED-4DB2-BD59-A6C34878D82A}">
+                    <a16:rowId xmlns:a16="http://schemas.microsoft.com/office/drawing/2014/main" val="2897862470"/>
+                  </a:ext>
+                </a:extLst>
+              </a:tr>
+              <a:tr h="587029">
+                <a:tc>
+                  <a:txBody>
+                    <a:bodyPr/>
+                    <a:lstStyle/>
+                    <a:p>
+                      <a:pPr algn="ctr"/>
+                      <a:endParaRPr lang="en-PH" dirty="0"/>
+                    </a:p>
+                  </a:txBody>
+                  <a:tcPr>
+                    <a:lnL w="12700" cap="flat" cmpd="sng" algn="ctr">
+                      <a:solidFill>
+                        <a:srgbClr val="00B050"/>
+                      </a:solidFill>
+                      <a:prstDash val="solid"/>
+                      <a:round/>
+                      <a:headEnd type="none" w="med" len="med"/>
+                      <a:tailEnd type="none" w="med" len="med"/>
+                    </a:lnL>
+                    <a:lnR w="12700" cap="flat" cmpd="sng" algn="ctr">
+                      <a:solidFill>
+                        <a:srgbClr val="00B050"/>
+                      </a:solidFill>
+                      <a:prstDash val="solid"/>
+                      <a:round/>
+                      <a:headEnd type="none" w="med" len="med"/>
+                      <a:tailEnd type="none" w="med" len="med"/>
+                    </a:lnR>
+                    <a:lnT w="12700" cap="flat" cmpd="sng" algn="ctr">
+                      <a:solidFill>
+                        <a:srgbClr val="00B050"/>
+                      </a:solidFill>
+                      <a:prstDash val="solid"/>
+                      <a:round/>
+                      <a:headEnd type="none" w="med" len="med"/>
+                      <a:tailEnd type="none" w="med" len="med"/>
+                    </a:lnT>
+                    <a:lnB w="12700" cap="flat" cmpd="sng" algn="ctr">
+                      <a:solidFill>
+                        <a:srgbClr val="00B050"/>
+                      </a:solidFill>
+                      <a:prstDash val="solid"/>
+                      <a:round/>
+                      <a:headEnd type="none" w="med" len="med"/>
+                      <a:tailEnd type="none" w="med" len="med"/>
+                    </a:lnB>
+                  </a:tcPr>
+                </a:tc>
+                <a:extLst>
+                  <a:ext uri="{0D108BD9-81ED-4DB2-BD59-A6C34878D82A}">
+                    <a16:rowId xmlns:a16="http://schemas.microsoft.com/office/drawing/2014/main" val="3239772172"/>
+                  </a:ext>
+                </a:extLst>
+              </a:tr>
+              <a:tr h="587029">
+                <a:tc>
+                  <a:txBody>
+                    <a:bodyPr/>
+                    <a:lstStyle/>
+                    <a:p>
+                      <a:pPr algn="ctr"/>
+                      <a:endParaRPr lang="en-PH" dirty="0"/>
+                    </a:p>
+                  </a:txBody>
+                  <a:tcPr>
+                    <a:lnL w="12700" cap="flat" cmpd="sng" algn="ctr">
+                      <a:solidFill>
+                        <a:srgbClr val="00B050"/>
+                      </a:solidFill>
+                      <a:prstDash val="solid"/>
+                      <a:round/>
+                      <a:headEnd type="none" w="med" len="med"/>
+                      <a:tailEnd type="none" w="med" len="med"/>
+                    </a:lnL>
+                    <a:lnR w="12700" cap="flat" cmpd="sng" algn="ctr">
+                      <a:solidFill>
+                        <a:srgbClr val="00B050"/>
+                      </a:solidFill>
+                      <a:prstDash val="solid"/>
+                      <a:round/>
+                      <a:headEnd type="none" w="med" len="med"/>
+                      <a:tailEnd type="none" w="med" len="med"/>
+                    </a:lnR>
+                    <a:lnT w="12700" cap="flat" cmpd="sng" algn="ctr">
+                      <a:solidFill>
+                        <a:srgbClr val="00B050"/>
+                      </a:solidFill>
+                      <a:prstDash val="solid"/>
+                      <a:round/>
+                      <a:headEnd type="none" w="med" len="med"/>
+                      <a:tailEnd type="none" w="med" len="med"/>
+                    </a:lnT>
+                    <a:lnB w="12700" cap="flat" cmpd="sng" algn="ctr">
+                      <a:solidFill>
+                        <a:srgbClr val="00B050"/>
+                      </a:solidFill>
+                      <a:prstDash val="solid"/>
+                      <a:round/>
+                      <a:headEnd type="none" w="med" len="med"/>
+                      <a:tailEnd type="none" w="med" len="med"/>
+                    </a:lnB>
+                  </a:tcPr>
+                </a:tc>
+                <a:extLst>
+                  <a:ext uri="{0D108BD9-81ED-4DB2-BD59-A6C34878D82A}">
+                    <a16:rowId xmlns:a16="http://schemas.microsoft.com/office/drawing/2014/main" val="3782862954"/>
+                  </a:ext>
+                </a:extLst>
+              </a:tr>
+              <a:tr h="587029">
+                <a:tc>
+                  <a:txBody>
+                    <a:bodyPr/>
+                    <a:lstStyle/>
+                    <a:p>
+                      <a:pPr algn="ctr"/>
+                      <a:endParaRPr lang="en-PH" dirty="0"/>
+                    </a:p>
+                  </a:txBody>
+                  <a:tcPr>
+                    <a:lnL w="12700" cap="flat" cmpd="sng" algn="ctr">
+                      <a:solidFill>
+                        <a:srgbClr val="00B050"/>
+                      </a:solidFill>
+                      <a:prstDash val="solid"/>
+                      <a:round/>
+                      <a:headEnd type="none" w="med" len="med"/>
+                      <a:tailEnd type="none" w="med" len="med"/>
+                    </a:lnL>
+                    <a:lnR w="12700" cap="flat" cmpd="sng" algn="ctr">
+                      <a:solidFill>
+                        <a:srgbClr val="00B050"/>
+                      </a:solidFill>
+                      <a:prstDash val="solid"/>
+                      <a:round/>
+                      <a:headEnd type="none" w="med" len="med"/>
+                      <a:tailEnd type="none" w="med" len="med"/>
+                    </a:lnR>
+                    <a:lnT w="12700" cap="flat" cmpd="sng" algn="ctr">
+                      <a:solidFill>
+                        <a:srgbClr val="00B050"/>
+                      </a:solidFill>
+                      <a:prstDash val="solid"/>
+                      <a:round/>
+                      <a:headEnd type="none" w="med" len="med"/>
+                      <a:tailEnd type="none" w="med" len="med"/>
+                    </a:lnT>
+                    <a:lnB w="12700" cap="flat" cmpd="sng" algn="ctr">
+                      <a:solidFill>
+                        <a:srgbClr val="00B050"/>
+                      </a:solidFill>
+                      <a:prstDash val="solid"/>
+                      <a:round/>
+                      <a:headEnd type="none" w="med" len="med"/>
+                      <a:tailEnd type="none" w="med" len="med"/>
+                    </a:lnB>
+                  </a:tcPr>
+                </a:tc>
+                <a:extLst>
+                  <a:ext uri="{0D108BD9-81ED-4DB2-BD59-A6C34878D82A}">
+                    <a16:rowId xmlns:a16="http://schemas.microsoft.com/office/drawing/2014/main" val="1516599522"/>
+                  </a:ext>
+                </a:extLst>
+              </a:tr>
+            </a:tbl>
+          </a:graphicData>
+        </a:graphic>
+      </p:graphicFrame>
+      <p:pic>
+        <p:nvPicPr>
+          <p:cNvPr id="19" name="Picture 18">
+            <a:extLst>
+              <a:ext uri="{FF2B5EF4-FFF2-40B4-BE49-F238E27FC236}">
+                <a16:creationId xmlns:a16="http://schemas.microsoft.com/office/drawing/2014/main" id="{6B5D80DF-A208-7ACB-167D-5FE7EC3A92E9}"/>
+              </a:ext>
+            </a:extLst>
+          </p:cNvPr>
+          <p:cNvPicPr>
+            <a:picLocks noChangeAspect="1"/>
+          </p:cNvPicPr>
+          <p:nvPr/>
+        </p:nvPicPr>
+        <p:blipFill>
+          <a:blip r:embed="rId3">
+            <a:extLst>
+              <a:ext uri="{28A0092B-C50C-407E-A947-70E740481C1C}">
+                <a14:useLocalDpi xmlns:a14="http://schemas.microsoft.com/office/drawing/2010/main" val="0"/>
+              </a:ext>
+              <a:ext uri="{837473B0-CC2E-450A-ABE3-18F120FF3D39}">
+                <a1611:picAttrSrcUrl xmlns:a1611="http://schemas.microsoft.com/office/drawing/2016/11/main" r:id="rId4"/>
+              </a:ext>
+            </a:extLst>
+          </a:blip>
+          <a:stretch>
+            <a:fillRect/>
+          </a:stretch>
+        </p:blipFill>
+        <p:spPr>
+          <a:xfrm>
+            <a:off x="7286139" y="4080301"/>
+            <a:ext cx="545921" cy="545921"/>
+          </a:xfrm>
+          <a:prstGeom prst="rect">
+            <a:avLst/>
+          </a:prstGeom>
+        </p:spPr>
+      </p:pic>
+      <p:sp>
+        <p:nvSpPr>
+          <p:cNvPr id="35" name="TextBox 34">
+            <a:extLst>
+              <a:ext uri="{FF2B5EF4-FFF2-40B4-BE49-F238E27FC236}">
+                <a16:creationId xmlns:a16="http://schemas.microsoft.com/office/drawing/2014/main" id="{FE0F3CE1-0825-FC9B-E69D-38482D61315B}"/>
+              </a:ext>
+            </a:extLst>
+          </p:cNvPr>
+          <p:cNvSpPr txBox="1"/>
+          <p:nvPr/>
+        </p:nvSpPr>
+        <p:spPr>
+          <a:xfrm>
+            <a:off x="5462282" y="4117982"/>
+            <a:ext cx="1155700" cy="369332"/>
+          </a:xfrm>
+          <a:prstGeom prst="rect">
+            <a:avLst/>
+          </a:prstGeom>
+          <a:noFill/>
+        </p:spPr>
+        <p:txBody>
+          <a:bodyPr wrap="square" rtlCol="0">
+            <a:spAutoFit/>
+          </a:bodyPr>
+          <a:lstStyle/>
+          <a:p>
+            <a:r>
+              <a:rPr lang="en-PH" b="1" dirty="0">
+                <a:solidFill>
+                  <a:srgbClr val="00B050"/>
+                </a:solidFill>
+              </a:rPr>
+              <a:t>Blue Shirt</a:t>
+            </a:r>
+          </a:p>
+        </p:txBody>
+      </p:sp>
+      <p:pic>
+        <p:nvPicPr>
+          <p:cNvPr id="17" name="Picture 16" descr="A picture containing shirt&#10;&#10;Description automatically generated">
+            <a:extLst>
+              <a:ext uri="{FF2B5EF4-FFF2-40B4-BE49-F238E27FC236}">
+                <a16:creationId xmlns:a16="http://schemas.microsoft.com/office/drawing/2014/main" id="{3142F74B-1AB6-9AE0-641D-E2B2E8B56B81}"/>
+              </a:ext>
+            </a:extLst>
+          </p:cNvPr>
+          <p:cNvPicPr>
+            <a:picLocks noChangeAspect="1"/>
+          </p:cNvPicPr>
+          <p:nvPr/>
+        </p:nvPicPr>
+        <p:blipFill>
+          <a:blip r:embed="rId5">
+            <a:extLst>
+              <a:ext uri="{28A0092B-C50C-407E-A947-70E740481C1C}">
+                <a14:useLocalDpi xmlns:a14="http://schemas.microsoft.com/office/drawing/2010/main" val="0"/>
+              </a:ext>
+              <a:ext uri="{837473B0-CC2E-450A-ABE3-18F120FF3D39}">
+                <a1611:picAttrSrcUrl xmlns:a1611="http://schemas.microsoft.com/office/drawing/2016/11/main" r:id="rId6"/>
+              </a:ext>
+            </a:extLst>
+          </a:blip>
+          <a:stretch>
+            <a:fillRect/>
+          </a:stretch>
+        </p:blipFill>
+        <p:spPr>
+          <a:xfrm>
+            <a:off x="7271407" y="3481007"/>
+            <a:ext cx="545921" cy="539180"/>
+          </a:xfrm>
+          <a:prstGeom prst="rect">
+            <a:avLst/>
+          </a:prstGeom>
+        </p:spPr>
+      </p:pic>
+      <p:sp>
+        <p:nvSpPr>
+          <p:cNvPr id="37" name="TextBox 36">
+            <a:extLst>
+              <a:ext uri="{FF2B5EF4-FFF2-40B4-BE49-F238E27FC236}">
+                <a16:creationId xmlns:a16="http://schemas.microsoft.com/office/drawing/2014/main" id="{7403A71F-2378-91E0-800D-7C1C1DA47264}"/>
+              </a:ext>
+            </a:extLst>
+          </p:cNvPr>
+          <p:cNvSpPr txBox="1"/>
+          <p:nvPr/>
+        </p:nvSpPr>
+        <p:spPr>
+          <a:xfrm>
+            <a:off x="5462282" y="3530376"/>
+            <a:ext cx="1155700" cy="369332"/>
+          </a:xfrm>
+          <a:prstGeom prst="rect">
+            <a:avLst/>
+          </a:prstGeom>
+          <a:noFill/>
+        </p:spPr>
+        <p:txBody>
+          <a:bodyPr wrap="square" rtlCol="0">
+            <a:spAutoFit/>
+          </a:bodyPr>
+          <a:lstStyle/>
+          <a:p>
+            <a:r>
+              <a:rPr lang="en-PH" b="1" dirty="0">
+                <a:solidFill>
+                  <a:srgbClr val="00B050"/>
+                </a:solidFill>
+              </a:rPr>
+              <a:t>Red Shirt</a:t>
+            </a:r>
+          </a:p>
+        </p:txBody>
+      </p:sp>
+      <p:pic>
+        <p:nvPicPr>
+          <p:cNvPr id="26" name="Picture 25" descr="Diagram&#10;&#10;Description automatically generated with low confidence">
+            <a:extLst>
+              <a:ext uri="{FF2B5EF4-FFF2-40B4-BE49-F238E27FC236}">
+                <a16:creationId xmlns:a16="http://schemas.microsoft.com/office/drawing/2014/main" id="{A3D0B298-7FAF-2C2D-644B-CAB0784A9AF4}"/>
+              </a:ext>
+            </a:extLst>
+          </p:cNvPr>
+          <p:cNvPicPr>
+            <a:picLocks noChangeAspect="1"/>
+          </p:cNvPicPr>
+          <p:nvPr/>
+        </p:nvPicPr>
+        <p:blipFill>
+          <a:blip r:embed="rId7">
+            <a:extLst>
+              <a:ext uri="{28A0092B-C50C-407E-A947-70E740481C1C}">
+                <a14:useLocalDpi xmlns:a14="http://schemas.microsoft.com/office/drawing/2010/main" val="0"/>
+              </a:ext>
+              <a:ext uri="{837473B0-CC2E-450A-ABE3-18F120FF3D39}">
+                <a1611:picAttrSrcUrl xmlns:a1611="http://schemas.microsoft.com/office/drawing/2016/11/main" r:id="rId8"/>
+              </a:ext>
+            </a:extLst>
+          </a:blip>
+          <a:stretch>
+            <a:fillRect/>
+          </a:stretch>
+        </p:blipFill>
+        <p:spPr>
+          <a:xfrm>
+            <a:off x="7271407" y="2874972"/>
+            <a:ext cx="545921" cy="545921"/>
+          </a:xfrm>
+          <a:prstGeom prst="rect">
+            <a:avLst/>
+          </a:prstGeom>
+        </p:spPr>
+      </p:pic>
+      <p:sp>
+        <p:nvSpPr>
+          <p:cNvPr id="38" name="TextBox 37">
+            <a:extLst>
+              <a:ext uri="{FF2B5EF4-FFF2-40B4-BE49-F238E27FC236}">
+                <a16:creationId xmlns:a16="http://schemas.microsoft.com/office/drawing/2014/main" id="{0322BE4B-D94F-360C-7C87-2FE8F4242181}"/>
+              </a:ext>
+            </a:extLst>
+          </p:cNvPr>
+          <p:cNvSpPr txBox="1"/>
+          <p:nvPr/>
+        </p:nvSpPr>
+        <p:spPr>
+          <a:xfrm>
+            <a:off x="5333888" y="3000168"/>
+            <a:ext cx="1417570" cy="369332"/>
+          </a:xfrm>
+          <a:prstGeom prst="rect">
+            <a:avLst/>
+          </a:prstGeom>
+          <a:noFill/>
+        </p:spPr>
+        <p:txBody>
+          <a:bodyPr wrap="square" rtlCol="0">
+            <a:spAutoFit/>
+          </a:bodyPr>
+          <a:lstStyle/>
+          <a:p>
+            <a:r>
+              <a:rPr lang="en-PH" b="1" dirty="0">
+                <a:solidFill>
+                  <a:srgbClr val="00B050"/>
+                </a:solidFill>
+              </a:rPr>
+              <a:t>Yellow Shirt</a:t>
+            </a:r>
+          </a:p>
+        </p:txBody>
+      </p:sp>
+      <p:pic>
+        <p:nvPicPr>
+          <p:cNvPr id="24" name="Picture 23" descr="Diagram&#10;&#10;Description automatically generated">
+            <a:extLst>
+              <a:ext uri="{FF2B5EF4-FFF2-40B4-BE49-F238E27FC236}">
+                <a16:creationId xmlns:a16="http://schemas.microsoft.com/office/drawing/2014/main" id="{9C913226-CC84-B580-843C-CECC1DAFA1CB}"/>
+              </a:ext>
+            </a:extLst>
+          </p:cNvPr>
+          <p:cNvPicPr>
+            <a:picLocks noChangeAspect="1"/>
+          </p:cNvPicPr>
+          <p:nvPr/>
+        </p:nvPicPr>
+        <p:blipFill>
+          <a:blip r:embed="rId9">
+            <a:extLst>
+              <a:ext uri="{28A0092B-C50C-407E-A947-70E740481C1C}">
+                <a14:useLocalDpi xmlns:a14="http://schemas.microsoft.com/office/drawing/2010/main" val="0"/>
+              </a:ext>
+              <a:ext uri="{837473B0-CC2E-450A-ABE3-18F120FF3D39}">
+                <a1611:picAttrSrcUrl xmlns:a1611="http://schemas.microsoft.com/office/drawing/2016/11/main" r:id="rId10"/>
+              </a:ext>
+            </a:extLst>
+          </a:blip>
+          <a:stretch>
+            <a:fillRect/>
+          </a:stretch>
+        </p:blipFill>
+        <p:spPr>
+          <a:xfrm>
+            <a:off x="7308773" y="2254942"/>
+            <a:ext cx="500655" cy="545921"/>
+          </a:xfrm>
+          <a:prstGeom prst="rect">
+            <a:avLst/>
+          </a:prstGeom>
+        </p:spPr>
+      </p:pic>
+      <p:sp>
+        <p:nvSpPr>
+          <p:cNvPr id="41" name="TextBox 40">
+            <a:extLst>
+              <a:ext uri="{FF2B5EF4-FFF2-40B4-BE49-F238E27FC236}">
+                <a16:creationId xmlns:a16="http://schemas.microsoft.com/office/drawing/2014/main" id="{CA526A93-CC91-B74C-07A3-6B77A7777CD6}"/>
+              </a:ext>
+            </a:extLst>
+          </p:cNvPr>
+          <p:cNvSpPr txBox="1"/>
+          <p:nvPr/>
+        </p:nvSpPr>
+        <p:spPr>
+          <a:xfrm>
+            <a:off x="5344055" y="2405334"/>
+            <a:ext cx="1417570" cy="369332"/>
+          </a:xfrm>
+          <a:prstGeom prst="rect">
+            <a:avLst/>
+          </a:prstGeom>
+          <a:noFill/>
+        </p:spPr>
+        <p:txBody>
+          <a:bodyPr wrap="square" rtlCol="0">
+            <a:spAutoFit/>
+          </a:bodyPr>
+          <a:lstStyle/>
+          <a:p>
+            <a:r>
+              <a:rPr lang="en-PH" b="1" dirty="0">
+                <a:solidFill>
+                  <a:srgbClr val="00B050"/>
+                </a:solidFill>
+              </a:rPr>
+              <a:t>Green Shirt</a:t>
+            </a:r>
+          </a:p>
+        </p:txBody>
+      </p:sp>
+      <p:sp>
+        <p:nvSpPr>
+          <p:cNvPr id="5" name="Title 1">
+            <a:extLst>
+              <a:ext uri="{FF2B5EF4-FFF2-40B4-BE49-F238E27FC236}">
+                <a16:creationId xmlns:a16="http://schemas.microsoft.com/office/drawing/2014/main" id="{3E7D0B2D-C147-FEEC-EC06-68ACBFB2F5DA}"/>
+              </a:ext>
+            </a:extLst>
+          </p:cNvPr>
+          <p:cNvSpPr>
+            <a:spLocks noGrp="1"/>
+          </p:cNvSpPr>
+          <p:nvPr>
+            <p:ph type="ctrTitle"/>
+          </p:nvPr>
+        </p:nvSpPr>
+        <p:spPr>
+          <a:xfrm>
+            <a:off x="1524000" y="497150"/>
+            <a:ext cx="9144000" cy="718459"/>
+          </a:xfrm>
+        </p:spPr>
+        <p:txBody>
+          <a:bodyPr>
+            <a:normAutofit fontScale="90000"/>
+          </a:bodyPr>
+          <a:lstStyle/>
+          <a:p>
+            <a:r>
+              <a:rPr lang="en-US" sz="6000" b="1" i="0" dirty="0">
+                <a:solidFill>
+                  <a:srgbClr val="00B050"/>
+                </a:solidFill>
+                <a:effectLst/>
+              </a:rPr>
+              <a:t>Push operation </a:t>
+            </a:r>
+            <a:endParaRPr lang="en-PH" dirty="0">
+              <a:solidFill>
+                <a:srgbClr val="00B050"/>
+              </a:solidFill>
+            </a:endParaRPr>
+          </a:p>
+        </p:txBody>
+      </p:sp>
+      <p:sp>
+        <p:nvSpPr>
+          <p:cNvPr id="8" name="TextBox 7">
+            <a:extLst>
+              <a:ext uri="{FF2B5EF4-FFF2-40B4-BE49-F238E27FC236}">
+                <a16:creationId xmlns:a16="http://schemas.microsoft.com/office/drawing/2014/main" id="{660FFE47-2AF2-5D46-46DB-3D5FF673BF9F}"/>
+              </a:ext>
+            </a:extLst>
+          </p:cNvPr>
+          <p:cNvSpPr txBox="1"/>
+          <p:nvPr/>
+        </p:nvSpPr>
+        <p:spPr>
+          <a:xfrm>
+            <a:off x="609600" y="5372418"/>
+            <a:ext cx="10972800" cy="861774"/>
+          </a:xfrm>
+          <a:prstGeom prst="rect">
+            <a:avLst/>
+          </a:prstGeom>
+          <a:noFill/>
+        </p:spPr>
+        <p:txBody>
+          <a:bodyPr wrap="square">
+            <a:spAutoFit/>
+          </a:bodyPr>
+          <a:lstStyle/>
+          <a:p>
+            <a:pPr algn="ctr"/>
+            <a:r>
+              <a:rPr lang="en-PH" sz="2500" b="1" dirty="0">
+                <a:solidFill>
+                  <a:schemeClr val="bg1"/>
+                </a:solidFill>
+              </a:rPr>
+              <a:t>Last In First Out (LIFO). </a:t>
+            </a:r>
+            <a:r>
+              <a:rPr lang="en-PH" sz="2500" dirty="0">
+                <a:solidFill>
+                  <a:schemeClr val="bg1"/>
+                </a:solidFill>
+              </a:rPr>
+              <a:t>The last element that is inserted (push) will be the first element that will be removed (pop)</a:t>
+            </a:r>
+          </a:p>
+        </p:txBody>
+      </p:sp>
+    </p:spTree>
+    <p:extLst>
+      <p:ext uri="{BB962C8B-B14F-4D97-AF65-F5344CB8AC3E}">
+        <p14:creationId xmlns:p14="http://schemas.microsoft.com/office/powerpoint/2010/main" val="2738361754"/>
+      </p:ext>
+    </p:extLst>
+  </p:cSld>
+  <p:clrMapOvr>
+    <a:masterClrMapping/>
+  </p:clrMapOvr>
+  <p:timing>
+    <p:tnLst>
+      <p:par>
+        <p:cTn id="1" dur="indefinite" restart="never" nodeType="tmRoot">
+          <p:childTnLst>
+            <p:seq concurrent="1" nextAc="seek">
+              <p:cTn id="2" dur="indefinite" nodeType="mainSeq">
+                <p:childTnLst>
+                  <p:par>
+                    <p:cTn id="3" fill="hold">
+                      <p:stCondLst>
+                        <p:cond delay="indefinite"/>
+                      </p:stCondLst>
+                      <p:childTnLst>
+                        <p:par>
+                          <p:cTn id="4" fill="hold">
+                            <p:stCondLst>
+                              <p:cond delay="0"/>
+                            </p:stCondLst>
+                            <p:childTnLst>
+                              <p:par>
+                                <p:cTn id="5" presetID="2" presetClass="entr" presetSubtype="1" fill="hold" grpId="0" nodeType="clickEffect">
+                                  <p:stCondLst>
+                                    <p:cond delay="0"/>
+                                  </p:stCondLst>
+                                  <p:childTnLst>
+                                    <p:set>
+                                      <p:cBhvr>
+                                        <p:cTn id="6" dur="1" fill="hold">
+                                          <p:stCondLst>
+                                            <p:cond delay="0"/>
+                                          </p:stCondLst>
+                                        </p:cTn>
+                                        <p:tgtEl>
+                                          <p:spTgt spid="35"/>
+                                        </p:tgtEl>
+                                        <p:attrNameLst>
+                                          <p:attrName>style.visibility</p:attrName>
+                                        </p:attrNameLst>
+                                      </p:cBhvr>
+                                      <p:to>
+                                        <p:strVal val="visible"/>
+                                      </p:to>
+                                    </p:set>
+                                    <p:anim calcmode="lin" valueType="num">
+                                      <p:cBhvr additive="base">
+                                        <p:cTn id="7" dur="500" fill="hold"/>
+                                        <p:tgtEl>
+                                          <p:spTgt spid="35"/>
+                                        </p:tgtEl>
+                                        <p:attrNameLst>
+                                          <p:attrName>ppt_x</p:attrName>
+                                        </p:attrNameLst>
+                                      </p:cBhvr>
+                                      <p:tavLst>
+                                        <p:tav tm="0">
+                                          <p:val>
+                                            <p:strVal val="#ppt_x"/>
+                                          </p:val>
+                                        </p:tav>
+                                        <p:tav tm="100000">
+                                          <p:val>
+                                            <p:strVal val="#ppt_x"/>
+                                          </p:val>
+                                        </p:tav>
+                                      </p:tavLst>
+                                    </p:anim>
+                                    <p:anim calcmode="lin" valueType="num">
+                                      <p:cBhvr additive="base">
+                                        <p:cTn id="8" dur="500" fill="hold"/>
+                                        <p:tgtEl>
+                                          <p:spTgt spid="35"/>
+                                        </p:tgtEl>
+                                        <p:attrNameLst>
+                                          <p:attrName>ppt_y</p:attrName>
+                                        </p:attrNameLst>
+                                      </p:cBhvr>
+                                      <p:tavLst>
+                                        <p:tav tm="0">
+                                          <p:val>
+                                            <p:strVal val="0-#ppt_h/2"/>
+                                          </p:val>
+                                        </p:tav>
+                                        <p:tav tm="100000">
+                                          <p:val>
+                                            <p:strVal val="#ppt_y"/>
+                                          </p:val>
+                                        </p:tav>
+                                      </p:tavLst>
+                                    </p:anim>
+                                  </p:childTnLst>
+                                </p:cTn>
+                              </p:par>
+                              <p:par>
+                                <p:cTn id="9" presetID="2" presetClass="entr" presetSubtype="1" fill="hold" nodeType="withEffect">
+                                  <p:stCondLst>
+                                    <p:cond delay="0"/>
+                                  </p:stCondLst>
+                                  <p:childTnLst>
+                                    <p:set>
+                                      <p:cBhvr>
+                                        <p:cTn id="10" dur="1" fill="hold">
+                                          <p:stCondLst>
+                                            <p:cond delay="0"/>
+                                          </p:stCondLst>
+                                        </p:cTn>
+                                        <p:tgtEl>
+                                          <p:spTgt spid="19"/>
+                                        </p:tgtEl>
+                                        <p:attrNameLst>
+                                          <p:attrName>style.visibility</p:attrName>
+                                        </p:attrNameLst>
+                                      </p:cBhvr>
+                                      <p:to>
+                                        <p:strVal val="visible"/>
+                                      </p:to>
+                                    </p:set>
+                                    <p:anim calcmode="lin" valueType="num">
+                                      <p:cBhvr additive="base">
+                                        <p:cTn id="11" dur="500" fill="hold"/>
+                                        <p:tgtEl>
+                                          <p:spTgt spid="19"/>
+                                        </p:tgtEl>
+                                        <p:attrNameLst>
+                                          <p:attrName>ppt_x</p:attrName>
+                                        </p:attrNameLst>
+                                      </p:cBhvr>
+                                      <p:tavLst>
+                                        <p:tav tm="0">
+                                          <p:val>
+                                            <p:strVal val="#ppt_x"/>
+                                          </p:val>
+                                        </p:tav>
+                                        <p:tav tm="100000">
+                                          <p:val>
+                                            <p:strVal val="#ppt_x"/>
+                                          </p:val>
+                                        </p:tav>
+                                      </p:tavLst>
+                                    </p:anim>
+                                    <p:anim calcmode="lin" valueType="num">
+                                      <p:cBhvr additive="base">
+                                        <p:cTn id="12" dur="500" fill="hold"/>
+                                        <p:tgtEl>
+                                          <p:spTgt spid="19"/>
+                                        </p:tgtEl>
+                                        <p:attrNameLst>
+                                          <p:attrName>ppt_y</p:attrName>
+                                        </p:attrNameLst>
+                                      </p:cBhvr>
+                                      <p:tavLst>
+                                        <p:tav tm="0">
+                                          <p:val>
+                                            <p:strVal val="0-#ppt_h/2"/>
+                                          </p:val>
+                                        </p:tav>
+                                        <p:tav tm="100000">
+                                          <p:val>
+                                            <p:strVal val="#ppt_y"/>
+                                          </p:val>
+                                        </p:tav>
+                                      </p:tavLst>
+                                    </p:anim>
+                                  </p:childTnLst>
+                                </p:cTn>
+                              </p:par>
+                            </p:childTnLst>
+                          </p:cTn>
+                        </p:par>
+                      </p:childTnLst>
+                    </p:cTn>
+                  </p:par>
+                  <p:par>
+                    <p:cTn id="13" fill="hold">
+                      <p:stCondLst>
+                        <p:cond delay="indefinite"/>
+                      </p:stCondLst>
+                      <p:childTnLst>
+                        <p:par>
+                          <p:cTn id="14" fill="hold">
+                            <p:stCondLst>
+                              <p:cond delay="0"/>
+                            </p:stCondLst>
+                            <p:childTnLst>
+                              <p:par>
+                                <p:cTn id="15" presetID="2" presetClass="entr" presetSubtype="1" fill="hold" grpId="0" nodeType="clickEffect">
+                                  <p:stCondLst>
+                                    <p:cond delay="0"/>
+                                  </p:stCondLst>
+                                  <p:childTnLst>
+                                    <p:set>
+                                      <p:cBhvr>
+                                        <p:cTn id="16" dur="1" fill="hold">
+                                          <p:stCondLst>
+                                            <p:cond delay="0"/>
+                                          </p:stCondLst>
+                                        </p:cTn>
+                                        <p:tgtEl>
+                                          <p:spTgt spid="37"/>
+                                        </p:tgtEl>
+                                        <p:attrNameLst>
+                                          <p:attrName>style.visibility</p:attrName>
+                                        </p:attrNameLst>
+                                      </p:cBhvr>
+                                      <p:to>
+                                        <p:strVal val="visible"/>
+                                      </p:to>
+                                    </p:set>
+                                    <p:anim calcmode="lin" valueType="num">
+                                      <p:cBhvr additive="base">
+                                        <p:cTn id="17" dur="500" fill="hold"/>
+                                        <p:tgtEl>
+                                          <p:spTgt spid="37"/>
+                                        </p:tgtEl>
+                                        <p:attrNameLst>
+                                          <p:attrName>ppt_x</p:attrName>
+                                        </p:attrNameLst>
+                                      </p:cBhvr>
+                                      <p:tavLst>
+                                        <p:tav tm="0">
+                                          <p:val>
+                                            <p:strVal val="#ppt_x"/>
+                                          </p:val>
+                                        </p:tav>
+                                        <p:tav tm="100000">
+                                          <p:val>
+                                            <p:strVal val="#ppt_x"/>
+                                          </p:val>
+                                        </p:tav>
+                                      </p:tavLst>
+                                    </p:anim>
+                                    <p:anim calcmode="lin" valueType="num">
+                                      <p:cBhvr additive="base">
+                                        <p:cTn id="18" dur="500" fill="hold"/>
+                                        <p:tgtEl>
+                                          <p:spTgt spid="37"/>
+                                        </p:tgtEl>
+                                        <p:attrNameLst>
+                                          <p:attrName>ppt_y</p:attrName>
+                                        </p:attrNameLst>
+                                      </p:cBhvr>
+                                      <p:tavLst>
+                                        <p:tav tm="0">
+                                          <p:val>
+                                            <p:strVal val="0-#ppt_h/2"/>
+                                          </p:val>
+                                        </p:tav>
+                                        <p:tav tm="100000">
+                                          <p:val>
+                                            <p:strVal val="#ppt_y"/>
+                                          </p:val>
+                                        </p:tav>
+                                      </p:tavLst>
+                                    </p:anim>
+                                  </p:childTnLst>
+                                </p:cTn>
+                              </p:par>
+                              <p:par>
+                                <p:cTn id="19" presetID="2" presetClass="entr" presetSubtype="1" fill="hold" nodeType="withEffect">
+                                  <p:stCondLst>
+                                    <p:cond delay="0"/>
+                                  </p:stCondLst>
+                                  <p:childTnLst>
+                                    <p:set>
+                                      <p:cBhvr>
+                                        <p:cTn id="20" dur="1" fill="hold">
+                                          <p:stCondLst>
+                                            <p:cond delay="0"/>
+                                          </p:stCondLst>
+                                        </p:cTn>
+                                        <p:tgtEl>
+                                          <p:spTgt spid="17"/>
+                                        </p:tgtEl>
+                                        <p:attrNameLst>
+                                          <p:attrName>style.visibility</p:attrName>
+                                        </p:attrNameLst>
+                                      </p:cBhvr>
+                                      <p:to>
+                                        <p:strVal val="visible"/>
+                                      </p:to>
+                                    </p:set>
+                                    <p:anim calcmode="lin" valueType="num">
+                                      <p:cBhvr additive="base">
+                                        <p:cTn id="21" dur="500" fill="hold"/>
+                                        <p:tgtEl>
+                                          <p:spTgt spid="17"/>
+                                        </p:tgtEl>
+                                        <p:attrNameLst>
+                                          <p:attrName>ppt_x</p:attrName>
+                                        </p:attrNameLst>
+                                      </p:cBhvr>
+                                      <p:tavLst>
+                                        <p:tav tm="0">
+                                          <p:val>
+                                            <p:strVal val="#ppt_x"/>
+                                          </p:val>
+                                        </p:tav>
+                                        <p:tav tm="100000">
+                                          <p:val>
+                                            <p:strVal val="#ppt_x"/>
+                                          </p:val>
+                                        </p:tav>
+                                      </p:tavLst>
+                                    </p:anim>
+                                    <p:anim calcmode="lin" valueType="num">
+                                      <p:cBhvr additive="base">
+                                        <p:cTn id="22" dur="500" fill="hold"/>
+                                        <p:tgtEl>
+                                          <p:spTgt spid="17"/>
+                                        </p:tgtEl>
+                                        <p:attrNameLst>
+                                          <p:attrName>ppt_y</p:attrName>
+                                        </p:attrNameLst>
+                                      </p:cBhvr>
+                                      <p:tavLst>
+                                        <p:tav tm="0">
+                                          <p:val>
+                                            <p:strVal val="0-#ppt_h/2"/>
+                                          </p:val>
+                                        </p:tav>
+                                        <p:tav tm="100000">
+                                          <p:val>
+                                            <p:strVal val="#ppt_y"/>
+                                          </p:val>
+                                        </p:tav>
+                                      </p:tavLst>
+                                    </p:anim>
+                                  </p:childTnLst>
+                                </p:cTn>
+                              </p:par>
+                            </p:childTnLst>
+                          </p:cTn>
+                        </p:par>
+                      </p:childTnLst>
+                    </p:cTn>
+                  </p:par>
+                  <p:par>
+                    <p:cTn id="23" fill="hold">
+                      <p:stCondLst>
+                        <p:cond delay="indefinite"/>
+                      </p:stCondLst>
+                      <p:childTnLst>
+                        <p:par>
+                          <p:cTn id="24" fill="hold">
+                            <p:stCondLst>
+                              <p:cond delay="0"/>
+                            </p:stCondLst>
+                            <p:childTnLst>
+                              <p:par>
+                                <p:cTn id="25" presetID="2" presetClass="entr" presetSubtype="1" fill="hold" grpId="0" nodeType="clickEffect">
+                                  <p:stCondLst>
+                                    <p:cond delay="0"/>
+                                  </p:stCondLst>
+                                  <p:childTnLst>
+                                    <p:set>
+                                      <p:cBhvr>
+                                        <p:cTn id="26" dur="1" fill="hold">
+                                          <p:stCondLst>
+                                            <p:cond delay="0"/>
+                                          </p:stCondLst>
+                                        </p:cTn>
+                                        <p:tgtEl>
+                                          <p:spTgt spid="38"/>
+                                        </p:tgtEl>
+                                        <p:attrNameLst>
+                                          <p:attrName>style.visibility</p:attrName>
+                                        </p:attrNameLst>
+                                      </p:cBhvr>
+                                      <p:to>
+                                        <p:strVal val="visible"/>
+                                      </p:to>
+                                    </p:set>
+                                    <p:anim calcmode="lin" valueType="num">
+                                      <p:cBhvr additive="base">
+                                        <p:cTn id="27" dur="500" fill="hold"/>
+                                        <p:tgtEl>
+                                          <p:spTgt spid="38"/>
+                                        </p:tgtEl>
+                                        <p:attrNameLst>
+                                          <p:attrName>ppt_x</p:attrName>
+                                        </p:attrNameLst>
+                                      </p:cBhvr>
+                                      <p:tavLst>
+                                        <p:tav tm="0">
+                                          <p:val>
+                                            <p:strVal val="#ppt_x"/>
+                                          </p:val>
+                                        </p:tav>
+                                        <p:tav tm="100000">
+                                          <p:val>
+                                            <p:strVal val="#ppt_x"/>
+                                          </p:val>
+                                        </p:tav>
+                                      </p:tavLst>
+                                    </p:anim>
+                                    <p:anim calcmode="lin" valueType="num">
+                                      <p:cBhvr additive="base">
+                                        <p:cTn id="28" dur="500" fill="hold"/>
+                                        <p:tgtEl>
+                                          <p:spTgt spid="38"/>
+                                        </p:tgtEl>
+                                        <p:attrNameLst>
+                                          <p:attrName>ppt_y</p:attrName>
+                                        </p:attrNameLst>
+                                      </p:cBhvr>
+                                      <p:tavLst>
+                                        <p:tav tm="0">
+                                          <p:val>
+                                            <p:strVal val="0-#ppt_h/2"/>
+                                          </p:val>
+                                        </p:tav>
+                                        <p:tav tm="100000">
+                                          <p:val>
+                                            <p:strVal val="#ppt_y"/>
+                                          </p:val>
+                                        </p:tav>
+                                      </p:tavLst>
+                                    </p:anim>
+                                  </p:childTnLst>
+                                </p:cTn>
+                              </p:par>
+                              <p:par>
+                                <p:cTn id="29" presetID="2" presetClass="entr" presetSubtype="1" fill="hold" nodeType="withEffect">
+                                  <p:stCondLst>
+                                    <p:cond delay="0"/>
+                                  </p:stCondLst>
+                                  <p:childTnLst>
+                                    <p:set>
+                                      <p:cBhvr>
+                                        <p:cTn id="30" dur="1" fill="hold">
+                                          <p:stCondLst>
+                                            <p:cond delay="0"/>
+                                          </p:stCondLst>
+                                        </p:cTn>
+                                        <p:tgtEl>
+                                          <p:spTgt spid="26"/>
+                                        </p:tgtEl>
+                                        <p:attrNameLst>
+                                          <p:attrName>style.visibility</p:attrName>
+                                        </p:attrNameLst>
+                                      </p:cBhvr>
+                                      <p:to>
+                                        <p:strVal val="visible"/>
+                                      </p:to>
+                                    </p:set>
+                                    <p:anim calcmode="lin" valueType="num">
+                                      <p:cBhvr additive="base">
+                                        <p:cTn id="31" dur="500" fill="hold"/>
+                                        <p:tgtEl>
+                                          <p:spTgt spid="26"/>
+                                        </p:tgtEl>
+                                        <p:attrNameLst>
+                                          <p:attrName>ppt_x</p:attrName>
+                                        </p:attrNameLst>
+                                      </p:cBhvr>
+                                      <p:tavLst>
+                                        <p:tav tm="0">
+                                          <p:val>
+                                            <p:strVal val="#ppt_x"/>
+                                          </p:val>
+                                        </p:tav>
+                                        <p:tav tm="100000">
+                                          <p:val>
+                                            <p:strVal val="#ppt_x"/>
+                                          </p:val>
+                                        </p:tav>
+                                      </p:tavLst>
+                                    </p:anim>
+                                    <p:anim calcmode="lin" valueType="num">
+                                      <p:cBhvr additive="base">
+                                        <p:cTn id="32" dur="500" fill="hold"/>
+                                        <p:tgtEl>
+                                          <p:spTgt spid="26"/>
+                                        </p:tgtEl>
+                                        <p:attrNameLst>
+                                          <p:attrName>ppt_y</p:attrName>
+                                        </p:attrNameLst>
+                                      </p:cBhvr>
+                                      <p:tavLst>
+                                        <p:tav tm="0">
+                                          <p:val>
+                                            <p:strVal val="0-#ppt_h/2"/>
+                                          </p:val>
+                                        </p:tav>
+                                        <p:tav tm="100000">
+                                          <p:val>
+                                            <p:strVal val="#ppt_y"/>
+                                          </p:val>
+                                        </p:tav>
+                                      </p:tavLst>
+                                    </p:anim>
+                                  </p:childTnLst>
+                                </p:cTn>
+                              </p:par>
+                            </p:childTnLst>
+                          </p:cTn>
+                        </p:par>
+                      </p:childTnLst>
+                    </p:cTn>
+                  </p:par>
+                  <p:par>
+                    <p:cTn id="33" fill="hold">
+                      <p:stCondLst>
+                        <p:cond delay="indefinite"/>
+                      </p:stCondLst>
+                      <p:childTnLst>
+                        <p:par>
+                          <p:cTn id="34" fill="hold">
+                            <p:stCondLst>
+                              <p:cond delay="0"/>
+                            </p:stCondLst>
+                            <p:childTnLst>
+                              <p:par>
+                                <p:cTn id="35" presetID="2" presetClass="entr" presetSubtype="1" fill="hold" grpId="0" nodeType="clickEffect">
+                                  <p:stCondLst>
+                                    <p:cond delay="0"/>
+                                  </p:stCondLst>
+                                  <p:childTnLst>
+                                    <p:set>
+                                      <p:cBhvr>
+                                        <p:cTn id="36" dur="1" fill="hold">
+                                          <p:stCondLst>
+                                            <p:cond delay="0"/>
+                                          </p:stCondLst>
+                                        </p:cTn>
+                                        <p:tgtEl>
+                                          <p:spTgt spid="41"/>
+                                        </p:tgtEl>
+                                        <p:attrNameLst>
+                                          <p:attrName>style.visibility</p:attrName>
+                                        </p:attrNameLst>
+                                      </p:cBhvr>
+                                      <p:to>
+                                        <p:strVal val="visible"/>
+                                      </p:to>
+                                    </p:set>
+                                    <p:anim calcmode="lin" valueType="num">
+                                      <p:cBhvr additive="base">
+                                        <p:cTn id="37" dur="500" fill="hold"/>
+                                        <p:tgtEl>
+                                          <p:spTgt spid="41"/>
+                                        </p:tgtEl>
+                                        <p:attrNameLst>
+                                          <p:attrName>ppt_x</p:attrName>
+                                        </p:attrNameLst>
+                                      </p:cBhvr>
+                                      <p:tavLst>
+                                        <p:tav tm="0">
+                                          <p:val>
+                                            <p:strVal val="#ppt_x"/>
+                                          </p:val>
+                                        </p:tav>
+                                        <p:tav tm="100000">
+                                          <p:val>
+                                            <p:strVal val="#ppt_x"/>
+                                          </p:val>
+                                        </p:tav>
+                                      </p:tavLst>
+                                    </p:anim>
+                                    <p:anim calcmode="lin" valueType="num">
+                                      <p:cBhvr additive="base">
+                                        <p:cTn id="38" dur="500" fill="hold"/>
+                                        <p:tgtEl>
+                                          <p:spTgt spid="41"/>
+                                        </p:tgtEl>
+                                        <p:attrNameLst>
+                                          <p:attrName>ppt_y</p:attrName>
+                                        </p:attrNameLst>
+                                      </p:cBhvr>
+                                      <p:tavLst>
+                                        <p:tav tm="0">
+                                          <p:val>
+                                            <p:strVal val="0-#ppt_h/2"/>
+                                          </p:val>
+                                        </p:tav>
+                                        <p:tav tm="100000">
+                                          <p:val>
+                                            <p:strVal val="#ppt_y"/>
+                                          </p:val>
+                                        </p:tav>
+                                      </p:tavLst>
+                                    </p:anim>
+                                  </p:childTnLst>
+                                </p:cTn>
+                              </p:par>
+                              <p:par>
+                                <p:cTn id="39" presetID="2" presetClass="entr" presetSubtype="1" fill="hold" nodeType="withEffect">
+                                  <p:stCondLst>
+                                    <p:cond delay="0"/>
+                                  </p:stCondLst>
+                                  <p:childTnLst>
+                                    <p:set>
+                                      <p:cBhvr>
+                                        <p:cTn id="40" dur="1" fill="hold">
+                                          <p:stCondLst>
+                                            <p:cond delay="0"/>
+                                          </p:stCondLst>
+                                        </p:cTn>
+                                        <p:tgtEl>
+                                          <p:spTgt spid="24"/>
+                                        </p:tgtEl>
+                                        <p:attrNameLst>
+                                          <p:attrName>style.visibility</p:attrName>
+                                        </p:attrNameLst>
+                                      </p:cBhvr>
+                                      <p:to>
+                                        <p:strVal val="visible"/>
+                                      </p:to>
+                                    </p:set>
+                                    <p:anim calcmode="lin" valueType="num">
+                                      <p:cBhvr additive="base">
+                                        <p:cTn id="41" dur="500" fill="hold"/>
+                                        <p:tgtEl>
+                                          <p:spTgt spid="24"/>
+                                        </p:tgtEl>
+                                        <p:attrNameLst>
+                                          <p:attrName>ppt_x</p:attrName>
+                                        </p:attrNameLst>
+                                      </p:cBhvr>
+                                      <p:tavLst>
+                                        <p:tav tm="0">
+                                          <p:val>
+                                            <p:strVal val="#ppt_x"/>
+                                          </p:val>
+                                        </p:tav>
+                                        <p:tav tm="100000">
+                                          <p:val>
+                                            <p:strVal val="#ppt_x"/>
+                                          </p:val>
+                                        </p:tav>
+                                      </p:tavLst>
+                                    </p:anim>
+                                    <p:anim calcmode="lin" valueType="num">
+                                      <p:cBhvr additive="base">
+                                        <p:cTn id="42" dur="500" fill="hold"/>
+                                        <p:tgtEl>
+                                          <p:spTgt spid="24"/>
+                                        </p:tgtEl>
+                                        <p:attrNameLst>
+                                          <p:attrName>ppt_y</p:attrName>
+                                        </p:attrNameLst>
+                                      </p:cBhvr>
+                                      <p:tavLst>
+                                        <p:tav tm="0">
+                                          <p:val>
+                                            <p:strVal val="0-#ppt_h/2"/>
+                                          </p:val>
+                                        </p:tav>
+                                        <p:tav tm="100000">
+                                          <p:val>
+                                            <p:strVal val="#ppt_y"/>
+                                          </p:val>
+                                        </p:tav>
+                                      </p:tavLst>
+                                    </p:anim>
+                                  </p:childTnLst>
+                                </p:cTn>
+                              </p:par>
+                            </p:childTnLst>
+                          </p:cTn>
+                        </p:par>
+                      </p:childTnLst>
+                    </p:cTn>
+                  </p:par>
+                </p:childTnLst>
+              </p:cTn>
+              <p:prevCondLst>
+                <p:cond evt="onPrev" delay="0">
+                  <p:tgtEl>
+                    <p:sldTgt/>
+                  </p:tgtEl>
+                </p:cond>
+              </p:prevCondLst>
+              <p:nextCondLst>
+                <p:cond evt="onNext" delay="0">
+                  <p:tgtEl>
+                    <p:sldTgt/>
+                  </p:tgtEl>
+                </p:cond>
+              </p:nextCondLst>
+            </p:seq>
+          </p:childTnLst>
+        </p:cTn>
+      </p:par>
+    </p:tnLst>
+    <p:bldLst>
+      <p:bldP spid="35" grpId="0"/>
+      <p:bldP spid="37" grpId="0"/>
+      <p:bldP spid="38" grpId="0"/>
+      <p:bldP spid="41" grpId="0"/>
+    </p:bldLst>
+  </p:timing>
+</p:sld>
+</file>
+
+<file path=ppt/slides/slide3.xml><?xml version="1.0" encoding="utf-8"?>
+<p:sld xmlns:a="http://schemas.openxmlformats.org/drawingml/2006/main" xmlns:r="http://schemas.openxmlformats.org/officeDocument/2006/relationships" xmlns:p="http://schemas.openxmlformats.org/presentationml/2006/main">
+  <p:cSld>
+    <p:bg>
+      <p:bgPr>
+        <a:solidFill>
+          <a:schemeClr val="tx1"/>
+        </a:solidFill>
+        <a:effectLst/>
+      </p:bgPr>
+    </p:bg>
+    <p:spTree>
+      <p:nvGrpSpPr>
+        <p:cNvPr id="1" name="">
+          <a:extLst>
+            <a:ext uri="{FF2B5EF4-FFF2-40B4-BE49-F238E27FC236}">
+              <a16:creationId xmlns:a16="http://schemas.microsoft.com/office/drawing/2014/main" id="{8B4E3A8C-3D7B-E414-866B-74A374903F54}"/>
+            </a:ext>
+          </a:extLst>
+        </p:cNvPr>
+        <p:cNvGrpSpPr/>
+        <p:nvPr/>
+      </p:nvGrpSpPr>
+      <p:grpSpPr>
+        <a:xfrm>
+          <a:off x="0" y="0"/>
+          <a:ext cx="0" cy="0"/>
+          <a:chOff x="0" y="0"/>
+          <a:chExt cx="0" cy="0"/>
+        </a:xfrm>
+      </p:grpSpPr>
+      <p:sp>
+        <p:nvSpPr>
+          <p:cNvPr id="2" name="Title 1">
+            <a:extLst>
+              <a:ext uri="{FF2B5EF4-FFF2-40B4-BE49-F238E27FC236}">
+                <a16:creationId xmlns:a16="http://schemas.microsoft.com/office/drawing/2014/main" id="{416632C4-3CB9-A713-C61D-15990A5F29B9}"/>
+              </a:ext>
+            </a:extLst>
+          </p:cNvPr>
+          <p:cNvSpPr>
+            <a:spLocks noGrp="1"/>
+          </p:cNvSpPr>
+          <p:nvPr>
+            <p:ph type="ctrTitle"/>
+          </p:nvPr>
+        </p:nvSpPr>
+        <p:spPr>
+          <a:xfrm>
+            <a:off x="1524000" y="497150"/>
+            <a:ext cx="9144000" cy="718459"/>
+          </a:xfrm>
+        </p:spPr>
+        <p:txBody>
+          <a:bodyPr>
+            <a:normAutofit fontScale="90000"/>
+          </a:bodyPr>
+          <a:lstStyle/>
+          <a:p>
+            <a:r>
+              <a:rPr lang="en-US" b="1" dirty="0">
+                <a:solidFill>
+                  <a:srgbClr val="00B050"/>
+                </a:solidFill>
+              </a:rPr>
+              <a:t>Pop operation</a:t>
+            </a:r>
+            <a:endParaRPr lang="en-PH" dirty="0">
+              <a:solidFill>
+                <a:srgbClr val="00B050"/>
+              </a:solidFill>
+            </a:endParaRPr>
+          </a:p>
+        </p:txBody>
+      </p:sp>
+      <p:sp>
+        <p:nvSpPr>
+          <p:cNvPr id="5" name="TextBox 4">
+            <a:extLst>
+              <a:ext uri="{FF2B5EF4-FFF2-40B4-BE49-F238E27FC236}">
+                <a16:creationId xmlns:a16="http://schemas.microsoft.com/office/drawing/2014/main" id="{B8EB4BD1-A253-AD6E-47CA-CDEB7621FF02}"/>
+              </a:ext>
+            </a:extLst>
+          </p:cNvPr>
+          <p:cNvSpPr txBox="1"/>
+          <p:nvPr/>
+        </p:nvSpPr>
+        <p:spPr>
+          <a:xfrm>
+            <a:off x="609600" y="5372418"/>
+            <a:ext cx="10972800" cy="861774"/>
+          </a:xfrm>
+          <a:prstGeom prst="rect">
+            <a:avLst/>
+          </a:prstGeom>
+          <a:noFill/>
+        </p:spPr>
+        <p:txBody>
+          <a:bodyPr wrap="square">
+            <a:spAutoFit/>
+          </a:bodyPr>
+          <a:lstStyle/>
+          <a:p>
+            <a:pPr algn="ctr"/>
+            <a:r>
+              <a:rPr lang="en-PH" sz="2500" b="1" dirty="0">
+                <a:solidFill>
+                  <a:schemeClr val="bg1"/>
+                </a:solidFill>
+              </a:rPr>
+              <a:t>Last In First Out (LIFO). </a:t>
+            </a:r>
+            <a:r>
+              <a:rPr lang="en-PH" sz="2500" dirty="0">
+                <a:solidFill>
+                  <a:schemeClr val="bg1"/>
+                </a:solidFill>
+              </a:rPr>
+              <a:t>The last element that is inserted (push) will be the first element that will be removed (pop)</a:t>
+            </a:r>
+          </a:p>
+        </p:txBody>
+      </p:sp>
+      <p:graphicFrame>
+        <p:nvGraphicFramePr>
+          <p:cNvPr id="8" name="Table 31">
+            <a:extLst>
+              <a:ext uri="{FF2B5EF4-FFF2-40B4-BE49-F238E27FC236}">
+                <a16:creationId xmlns:a16="http://schemas.microsoft.com/office/drawing/2014/main" id="{9DD436CF-6927-A6F3-AF87-BBEE34985FC5}"/>
+              </a:ext>
+            </a:extLst>
+          </p:cNvPr>
+          <p:cNvGraphicFramePr>
+            <a:graphicFrameLocks noGrp="1"/>
+          </p:cNvGraphicFramePr>
+          <p:nvPr/>
+        </p:nvGraphicFramePr>
+        <p:xfrm>
+          <a:off x="5021592" y="2278106"/>
+          <a:ext cx="2037080" cy="2348116"/>
+        </p:xfrm>
+        <a:graphic>
+          <a:graphicData uri="http://schemas.openxmlformats.org/drawingml/2006/table">
+            <a:tbl>
+              <a:tblPr firstRow="1" bandRow="1">
+                <a:tableStyleId>{5940675A-B579-460E-94D1-54222C63F5DA}</a:tableStyleId>
+              </a:tblPr>
+              <a:tblGrid>
+                <a:gridCol w="2037080">
+                  <a:extLst>
+                    <a:ext uri="{9D8B030D-6E8A-4147-A177-3AD203B41FA5}">
+                      <a16:colId xmlns:a16="http://schemas.microsoft.com/office/drawing/2014/main" val="1867406527"/>
+                    </a:ext>
+                  </a:extLst>
+                </a:gridCol>
+              </a:tblGrid>
+              <a:tr h="587029">
+                <a:tc>
+                  <a:txBody>
+                    <a:bodyPr/>
+                    <a:lstStyle/>
+                    <a:p>
+                      <a:pPr algn="ctr"/>
+                      <a:endParaRPr lang="en-PH" dirty="0"/>
+                    </a:p>
+                  </a:txBody>
+                  <a:tcPr>
+                    <a:lnL w="12700" cap="flat" cmpd="sng" algn="ctr">
+                      <a:solidFill>
+                        <a:srgbClr val="00B050"/>
+                      </a:solidFill>
+                      <a:prstDash val="solid"/>
+                      <a:round/>
+                      <a:headEnd type="none" w="med" len="med"/>
+                      <a:tailEnd type="none" w="med" len="med"/>
+                    </a:lnL>
+                    <a:lnR w="12700" cap="flat" cmpd="sng" algn="ctr">
+                      <a:solidFill>
+                        <a:srgbClr val="00B050"/>
+                      </a:solidFill>
+                      <a:prstDash val="solid"/>
+                      <a:round/>
+                      <a:headEnd type="none" w="med" len="med"/>
+                      <a:tailEnd type="none" w="med" len="med"/>
+                    </a:lnR>
+                    <a:lnT w="12700" cap="flat" cmpd="sng" algn="ctr">
+                      <a:solidFill>
+                        <a:srgbClr val="00B050"/>
+                      </a:solidFill>
+                      <a:prstDash val="solid"/>
+                      <a:round/>
+                      <a:headEnd type="none" w="med" len="med"/>
+                      <a:tailEnd type="none" w="med" len="med"/>
+                    </a:lnT>
+                    <a:lnB w="12700" cap="flat" cmpd="sng" algn="ctr">
+                      <a:solidFill>
+                        <a:srgbClr val="00B050"/>
+                      </a:solidFill>
+                      <a:prstDash val="solid"/>
+                      <a:round/>
+                      <a:headEnd type="none" w="med" len="med"/>
+                      <a:tailEnd type="none" w="med" len="med"/>
+                    </a:lnB>
+                  </a:tcPr>
+                </a:tc>
+                <a:extLst>
+                  <a:ext uri="{0D108BD9-81ED-4DB2-BD59-A6C34878D82A}">
+                    <a16:rowId xmlns:a16="http://schemas.microsoft.com/office/drawing/2014/main" val="2897862470"/>
+                  </a:ext>
+                </a:extLst>
+              </a:tr>
+              <a:tr h="587029">
+                <a:tc>
+                  <a:txBody>
+                    <a:bodyPr/>
+                    <a:lstStyle/>
+                    <a:p>
+                      <a:pPr algn="ctr"/>
+                      <a:endParaRPr lang="en-PH" dirty="0"/>
+                    </a:p>
+                  </a:txBody>
+                  <a:tcPr>
+                    <a:lnL w="12700" cap="flat" cmpd="sng" algn="ctr">
+                      <a:solidFill>
+                        <a:srgbClr val="00B050"/>
+                      </a:solidFill>
+                      <a:prstDash val="solid"/>
+                      <a:round/>
+                      <a:headEnd type="none" w="med" len="med"/>
+                      <a:tailEnd type="none" w="med" len="med"/>
+                    </a:lnL>
+                    <a:lnR w="12700" cap="flat" cmpd="sng" algn="ctr">
+                      <a:solidFill>
+                        <a:srgbClr val="00B050"/>
+                      </a:solidFill>
+                      <a:prstDash val="solid"/>
+                      <a:round/>
+                      <a:headEnd type="none" w="med" len="med"/>
+                      <a:tailEnd type="none" w="med" len="med"/>
+                    </a:lnR>
+                    <a:lnT w="12700" cap="flat" cmpd="sng" algn="ctr">
+                      <a:solidFill>
+                        <a:srgbClr val="00B050"/>
+                      </a:solidFill>
+                      <a:prstDash val="solid"/>
+                      <a:round/>
+                      <a:headEnd type="none" w="med" len="med"/>
+                      <a:tailEnd type="none" w="med" len="med"/>
+                    </a:lnT>
+                    <a:lnB w="12700" cap="flat" cmpd="sng" algn="ctr">
+                      <a:solidFill>
+                        <a:srgbClr val="00B050"/>
+                      </a:solidFill>
+                      <a:prstDash val="solid"/>
+                      <a:round/>
+                      <a:headEnd type="none" w="med" len="med"/>
+                      <a:tailEnd type="none" w="med" len="med"/>
+                    </a:lnB>
+                  </a:tcPr>
+                </a:tc>
+                <a:extLst>
+                  <a:ext uri="{0D108BD9-81ED-4DB2-BD59-A6C34878D82A}">
+                    <a16:rowId xmlns:a16="http://schemas.microsoft.com/office/drawing/2014/main" val="3239772172"/>
+                  </a:ext>
+                </a:extLst>
+              </a:tr>
+              <a:tr h="587029">
+                <a:tc>
+                  <a:txBody>
+                    <a:bodyPr/>
+                    <a:lstStyle/>
+                    <a:p>
+                      <a:pPr algn="ctr"/>
+                      <a:endParaRPr lang="en-PH" dirty="0"/>
+                    </a:p>
+                  </a:txBody>
+                  <a:tcPr>
+                    <a:lnL w="12700" cap="flat" cmpd="sng" algn="ctr">
+                      <a:solidFill>
+                        <a:srgbClr val="00B050"/>
+                      </a:solidFill>
+                      <a:prstDash val="solid"/>
+                      <a:round/>
+                      <a:headEnd type="none" w="med" len="med"/>
+                      <a:tailEnd type="none" w="med" len="med"/>
+                    </a:lnL>
+                    <a:lnR w="12700" cap="flat" cmpd="sng" algn="ctr">
+                      <a:solidFill>
+                        <a:srgbClr val="00B050"/>
+                      </a:solidFill>
+                      <a:prstDash val="solid"/>
+                      <a:round/>
+                      <a:headEnd type="none" w="med" len="med"/>
+                      <a:tailEnd type="none" w="med" len="med"/>
+                    </a:lnR>
+                    <a:lnT w="12700" cap="flat" cmpd="sng" algn="ctr">
+                      <a:solidFill>
+                        <a:srgbClr val="00B050"/>
+                      </a:solidFill>
+                      <a:prstDash val="solid"/>
+                      <a:round/>
+                      <a:headEnd type="none" w="med" len="med"/>
+                      <a:tailEnd type="none" w="med" len="med"/>
+                    </a:lnT>
+                    <a:lnB w="12700" cap="flat" cmpd="sng" algn="ctr">
+                      <a:solidFill>
+                        <a:srgbClr val="00B050"/>
+                      </a:solidFill>
+                      <a:prstDash val="solid"/>
+                      <a:round/>
+                      <a:headEnd type="none" w="med" len="med"/>
+                      <a:tailEnd type="none" w="med" len="med"/>
+                    </a:lnB>
+                  </a:tcPr>
+                </a:tc>
+                <a:extLst>
+                  <a:ext uri="{0D108BD9-81ED-4DB2-BD59-A6C34878D82A}">
+                    <a16:rowId xmlns:a16="http://schemas.microsoft.com/office/drawing/2014/main" val="3782862954"/>
+                  </a:ext>
+                </a:extLst>
+              </a:tr>
+              <a:tr h="587029">
+                <a:tc>
+                  <a:txBody>
+                    <a:bodyPr/>
+                    <a:lstStyle/>
+                    <a:p>
+                      <a:pPr algn="ctr"/>
+                      <a:endParaRPr lang="en-PH" dirty="0"/>
+                    </a:p>
+                  </a:txBody>
+                  <a:tcPr>
+                    <a:lnL w="12700" cap="flat" cmpd="sng" algn="ctr">
+                      <a:solidFill>
+                        <a:srgbClr val="00B050"/>
+                      </a:solidFill>
+                      <a:prstDash val="solid"/>
+                      <a:round/>
+                      <a:headEnd type="none" w="med" len="med"/>
+                      <a:tailEnd type="none" w="med" len="med"/>
+                    </a:lnL>
+                    <a:lnR w="12700" cap="flat" cmpd="sng" algn="ctr">
+                      <a:solidFill>
+                        <a:srgbClr val="00B050"/>
+                      </a:solidFill>
+                      <a:prstDash val="solid"/>
+                      <a:round/>
+                      <a:headEnd type="none" w="med" len="med"/>
+                      <a:tailEnd type="none" w="med" len="med"/>
+                    </a:lnR>
+                    <a:lnT w="12700" cap="flat" cmpd="sng" algn="ctr">
+                      <a:solidFill>
+                        <a:srgbClr val="00B050"/>
+                      </a:solidFill>
+                      <a:prstDash val="solid"/>
+                      <a:round/>
+                      <a:headEnd type="none" w="med" len="med"/>
+                      <a:tailEnd type="none" w="med" len="med"/>
+                    </a:lnT>
+                    <a:lnB w="12700" cap="flat" cmpd="sng" algn="ctr">
+                      <a:solidFill>
+                        <a:srgbClr val="00B050"/>
+                      </a:solidFill>
+                      <a:prstDash val="solid"/>
+                      <a:round/>
+                      <a:headEnd type="none" w="med" len="med"/>
+                      <a:tailEnd type="none" w="med" len="med"/>
+                    </a:lnB>
+                  </a:tcPr>
+                </a:tc>
+                <a:extLst>
+                  <a:ext uri="{0D108BD9-81ED-4DB2-BD59-A6C34878D82A}">
+                    <a16:rowId xmlns:a16="http://schemas.microsoft.com/office/drawing/2014/main" val="1516599522"/>
+                  </a:ext>
+                </a:extLst>
+              </a:tr>
+            </a:tbl>
+          </a:graphicData>
+        </a:graphic>
+      </p:graphicFrame>
+      <p:pic>
+        <p:nvPicPr>
+          <p:cNvPr id="9" name="Picture 8">
+            <a:extLst>
+              <a:ext uri="{FF2B5EF4-FFF2-40B4-BE49-F238E27FC236}">
+                <a16:creationId xmlns:a16="http://schemas.microsoft.com/office/drawing/2014/main" id="{1D74341B-7B28-D386-B516-D6E229DDEFBE}"/>
+              </a:ext>
+            </a:extLst>
+          </p:cNvPr>
+          <p:cNvPicPr>
+            <a:picLocks noChangeAspect="1"/>
+          </p:cNvPicPr>
+          <p:nvPr/>
+        </p:nvPicPr>
+        <p:blipFill>
+          <a:blip r:embed="rId3">
+            <a:extLst>
+              <a:ext uri="{28A0092B-C50C-407E-A947-70E740481C1C}">
+                <a14:useLocalDpi xmlns:a14="http://schemas.microsoft.com/office/drawing/2010/main" val="0"/>
+              </a:ext>
+              <a:ext uri="{837473B0-CC2E-450A-ABE3-18F120FF3D39}">
+                <a1611:picAttrSrcUrl xmlns:a1611="http://schemas.microsoft.com/office/drawing/2016/11/main" r:id="rId4"/>
+              </a:ext>
+            </a:extLst>
+          </a:blip>
+          <a:stretch>
+            <a:fillRect/>
+          </a:stretch>
+        </p:blipFill>
+        <p:spPr>
+          <a:xfrm>
+            <a:off x="7286139" y="4080301"/>
+            <a:ext cx="545921" cy="545921"/>
+          </a:xfrm>
+          <a:prstGeom prst="rect">
+            <a:avLst/>
+          </a:prstGeom>
+        </p:spPr>
+      </p:pic>
+      <p:sp>
+        <p:nvSpPr>
+          <p:cNvPr id="11" name="TextBox 10">
+            <a:extLst>
+              <a:ext uri="{FF2B5EF4-FFF2-40B4-BE49-F238E27FC236}">
+                <a16:creationId xmlns:a16="http://schemas.microsoft.com/office/drawing/2014/main" id="{1A1DACAC-C7DA-CC49-AEBB-D5F2A4FFBCD5}"/>
+              </a:ext>
+            </a:extLst>
+          </p:cNvPr>
+          <p:cNvSpPr txBox="1"/>
+          <p:nvPr/>
+        </p:nvSpPr>
+        <p:spPr>
+          <a:xfrm>
+            <a:off x="5462282" y="4117982"/>
+            <a:ext cx="1155700" cy="369332"/>
+          </a:xfrm>
+          <a:prstGeom prst="rect">
+            <a:avLst/>
+          </a:prstGeom>
+          <a:noFill/>
+        </p:spPr>
+        <p:txBody>
+          <a:bodyPr wrap="square" rtlCol="0">
+            <a:spAutoFit/>
+          </a:bodyPr>
+          <a:lstStyle/>
+          <a:p>
+            <a:r>
+              <a:rPr lang="en-PH" b="1" dirty="0">
+                <a:solidFill>
+                  <a:srgbClr val="00B050"/>
+                </a:solidFill>
+              </a:rPr>
+              <a:t>Blue Shirt</a:t>
+            </a:r>
+          </a:p>
+        </p:txBody>
+      </p:sp>
+      <p:pic>
+        <p:nvPicPr>
+          <p:cNvPr id="12" name="Picture 11" descr="A picture containing shirt&#10;&#10;Description automatically generated">
+            <a:extLst>
+              <a:ext uri="{FF2B5EF4-FFF2-40B4-BE49-F238E27FC236}">
+                <a16:creationId xmlns:a16="http://schemas.microsoft.com/office/drawing/2014/main" id="{3C777A8D-BA9D-8DEA-2767-5571EF1F115B}"/>
+              </a:ext>
+            </a:extLst>
+          </p:cNvPr>
+          <p:cNvPicPr>
+            <a:picLocks noChangeAspect="1"/>
+          </p:cNvPicPr>
+          <p:nvPr/>
+        </p:nvPicPr>
+        <p:blipFill>
+          <a:blip r:embed="rId5">
+            <a:extLst>
+              <a:ext uri="{28A0092B-C50C-407E-A947-70E740481C1C}">
+                <a14:useLocalDpi xmlns:a14="http://schemas.microsoft.com/office/drawing/2010/main" val="0"/>
+              </a:ext>
+              <a:ext uri="{837473B0-CC2E-450A-ABE3-18F120FF3D39}">
+                <a1611:picAttrSrcUrl xmlns:a1611="http://schemas.microsoft.com/office/drawing/2016/11/main" r:id="rId6"/>
+              </a:ext>
+            </a:extLst>
+          </a:blip>
+          <a:stretch>
+            <a:fillRect/>
+          </a:stretch>
+        </p:blipFill>
+        <p:spPr>
+          <a:xfrm>
+            <a:off x="7271407" y="3481007"/>
+            <a:ext cx="545921" cy="539180"/>
+          </a:xfrm>
+          <a:prstGeom prst="rect">
+            <a:avLst/>
+          </a:prstGeom>
+        </p:spPr>
+      </p:pic>
+      <p:sp>
+        <p:nvSpPr>
+          <p:cNvPr id="13" name="TextBox 12">
+            <a:extLst>
+              <a:ext uri="{FF2B5EF4-FFF2-40B4-BE49-F238E27FC236}">
+                <a16:creationId xmlns:a16="http://schemas.microsoft.com/office/drawing/2014/main" id="{45881B8A-955A-1A76-9612-A5CA974275A0}"/>
+              </a:ext>
+            </a:extLst>
+          </p:cNvPr>
+          <p:cNvSpPr txBox="1"/>
+          <p:nvPr/>
+        </p:nvSpPr>
+        <p:spPr>
+          <a:xfrm>
+            <a:off x="5462282" y="3530376"/>
+            <a:ext cx="1155700" cy="369332"/>
+          </a:xfrm>
+          <a:prstGeom prst="rect">
+            <a:avLst/>
+          </a:prstGeom>
+          <a:noFill/>
+        </p:spPr>
+        <p:txBody>
+          <a:bodyPr wrap="square" rtlCol="0">
+            <a:spAutoFit/>
+          </a:bodyPr>
+          <a:lstStyle/>
+          <a:p>
+            <a:r>
+              <a:rPr lang="en-PH" b="1" dirty="0">
+                <a:solidFill>
+                  <a:srgbClr val="00B050"/>
+                </a:solidFill>
+              </a:rPr>
+              <a:t>Red Shirt</a:t>
+            </a:r>
+          </a:p>
+        </p:txBody>
+      </p:sp>
+      <p:pic>
+        <p:nvPicPr>
+          <p:cNvPr id="14" name="Picture 13" descr="Diagram&#10;&#10;Description automatically generated with low confidence">
+            <a:extLst>
+              <a:ext uri="{FF2B5EF4-FFF2-40B4-BE49-F238E27FC236}">
+                <a16:creationId xmlns:a16="http://schemas.microsoft.com/office/drawing/2014/main" id="{80277B7A-0C3E-C1BF-0D8F-13ABA4B19F22}"/>
+              </a:ext>
+            </a:extLst>
+          </p:cNvPr>
+          <p:cNvPicPr>
+            <a:picLocks noChangeAspect="1"/>
+          </p:cNvPicPr>
+          <p:nvPr/>
+        </p:nvPicPr>
+        <p:blipFill>
+          <a:blip r:embed="rId7">
+            <a:extLst>
+              <a:ext uri="{28A0092B-C50C-407E-A947-70E740481C1C}">
+                <a14:useLocalDpi xmlns:a14="http://schemas.microsoft.com/office/drawing/2010/main" val="0"/>
+              </a:ext>
+              <a:ext uri="{837473B0-CC2E-450A-ABE3-18F120FF3D39}">
+                <a1611:picAttrSrcUrl xmlns:a1611="http://schemas.microsoft.com/office/drawing/2016/11/main" r:id="rId8"/>
+              </a:ext>
+            </a:extLst>
+          </a:blip>
+          <a:stretch>
+            <a:fillRect/>
+          </a:stretch>
+        </p:blipFill>
+        <p:spPr>
+          <a:xfrm>
+            <a:off x="7271407" y="2874972"/>
+            <a:ext cx="545921" cy="545921"/>
+          </a:xfrm>
+          <a:prstGeom prst="rect">
+            <a:avLst/>
+          </a:prstGeom>
+        </p:spPr>
+      </p:pic>
+      <p:sp>
+        <p:nvSpPr>
+          <p:cNvPr id="15" name="TextBox 14">
+            <a:extLst>
+              <a:ext uri="{FF2B5EF4-FFF2-40B4-BE49-F238E27FC236}">
+                <a16:creationId xmlns:a16="http://schemas.microsoft.com/office/drawing/2014/main" id="{E73D4026-F887-3E01-F50A-2467CCB4B490}"/>
+              </a:ext>
+            </a:extLst>
+          </p:cNvPr>
+          <p:cNvSpPr txBox="1"/>
+          <p:nvPr/>
+        </p:nvSpPr>
+        <p:spPr>
+          <a:xfrm>
+            <a:off x="5333888" y="3000168"/>
+            <a:ext cx="1417570" cy="369332"/>
+          </a:xfrm>
+          <a:prstGeom prst="rect">
+            <a:avLst/>
+          </a:prstGeom>
+          <a:noFill/>
+        </p:spPr>
+        <p:txBody>
+          <a:bodyPr wrap="square" rtlCol="0">
+            <a:spAutoFit/>
+          </a:bodyPr>
+          <a:lstStyle/>
+          <a:p>
+            <a:r>
+              <a:rPr lang="en-PH" b="1" dirty="0">
+                <a:solidFill>
+                  <a:srgbClr val="00B050"/>
+                </a:solidFill>
+              </a:rPr>
+              <a:t>Yellow Shirt</a:t>
+            </a:r>
+          </a:p>
+        </p:txBody>
+      </p:sp>
+      <p:pic>
+        <p:nvPicPr>
+          <p:cNvPr id="16" name="Picture 15" descr="Diagram&#10;&#10;Description automatically generated">
+            <a:extLst>
+              <a:ext uri="{FF2B5EF4-FFF2-40B4-BE49-F238E27FC236}">
+                <a16:creationId xmlns:a16="http://schemas.microsoft.com/office/drawing/2014/main" id="{250A8A6C-9722-0103-92F6-628F09425197}"/>
+              </a:ext>
+            </a:extLst>
+          </p:cNvPr>
+          <p:cNvPicPr>
+            <a:picLocks noChangeAspect="1"/>
+          </p:cNvPicPr>
+          <p:nvPr/>
+        </p:nvPicPr>
+        <p:blipFill>
+          <a:blip r:embed="rId9">
+            <a:extLst>
+              <a:ext uri="{28A0092B-C50C-407E-A947-70E740481C1C}">
+                <a14:useLocalDpi xmlns:a14="http://schemas.microsoft.com/office/drawing/2010/main" val="0"/>
+              </a:ext>
+              <a:ext uri="{837473B0-CC2E-450A-ABE3-18F120FF3D39}">
+                <a1611:picAttrSrcUrl xmlns:a1611="http://schemas.microsoft.com/office/drawing/2016/11/main" r:id="rId10"/>
+              </a:ext>
+            </a:extLst>
+          </a:blip>
+          <a:stretch>
+            <a:fillRect/>
+          </a:stretch>
+        </p:blipFill>
+        <p:spPr>
+          <a:xfrm>
+            <a:off x="7308773" y="2254942"/>
+            <a:ext cx="500655" cy="545921"/>
+          </a:xfrm>
+          <a:prstGeom prst="rect">
+            <a:avLst/>
+          </a:prstGeom>
+        </p:spPr>
+      </p:pic>
+      <p:sp>
+        <p:nvSpPr>
+          <p:cNvPr id="18" name="TextBox 17">
+            <a:extLst>
+              <a:ext uri="{FF2B5EF4-FFF2-40B4-BE49-F238E27FC236}">
+                <a16:creationId xmlns:a16="http://schemas.microsoft.com/office/drawing/2014/main" id="{CF05E9DC-A767-0690-D2A5-F02CF58FC0D4}"/>
+              </a:ext>
+            </a:extLst>
+          </p:cNvPr>
+          <p:cNvSpPr txBox="1"/>
+          <p:nvPr/>
+        </p:nvSpPr>
+        <p:spPr>
+          <a:xfrm>
+            <a:off x="5344055" y="2405334"/>
+            <a:ext cx="1417570" cy="369332"/>
+          </a:xfrm>
+          <a:prstGeom prst="rect">
+            <a:avLst/>
+          </a:prstGeom>
+          <a:noFill/>
+        </p:spPr>
+        <p:txBody>
+          <a:bodyPr wrap="square" rtlCol="0">
+            <a:spAutoFit/>
+          </a:bodyPr>
+          <a:lstStyle/>
+          <a:p>
+            <a:r>
+              <a:rPr lang="en-PH" b="1" dirty="0">
+                <a:solidFill>
+                  <a:srgbClr val="00B050"/>
+                </a:solidFill>
+              </a:rPr>
+              <a:t>Green Shirt</a:t>
+            </a:r>
+          </a:p>
+        </p:txBody>
+      </p:sp>
+    </p:spTree>
+    <p:extLst>
+      <p:ext uri="{BB962C8B-B14F-4D97-AF65-F5344CB8AC3E}">
+        <p14:creationId xmlns:p14="http://schemas.microsoft.com/office/powerpoint/2010/main" val="2204929882"/>
+      </p:ext>
+    </p:extLst>
+  </p:cSld>
+  <p:clrMapOvr>
+    <a:masterClrMapping/>
+  </p:clrMapOvr>
+  <p:timing>
+    <p:tnLst>
+      <p:par>
+        <p:cTn id="1" dur="indefinite" restart="never" nodeType="tmRoot">
+          <p:childTnLst>
+            <p:seq concurrent="1" nextAc="seek">
+              <p:cTn id="2" dur="indefinite" nodeType="mainSeq">
+                <p:childTnLst>
+                  <p:par>
+                    <p:cTn id="3" fill="hold">
+                      <p:stCondLst>
+                        <p:cond delay="indefinite"/>
+                      </p:stCondLst>
+                      <p:childTnLst>
+                        <p:par>
+                          <p:cTn id="4" fill="hold">
+                            <p:stCondLst>
+                              <p:cond delay="0"/>
+                            </p:stCondLst>
+                            <p:childTnLst>
+                              <p:par>
+                                <p:cTn id="5" presetID="2" presetClass="exit" presetSubtype="1" fill="hold" grpId="0" nodeType="clickEffect">
+                                  <p:stCondLst>
+                                    <p:cond delay="0"/>
+                                  </p:stCondLst>
+                                  <p:childTnLst>
+                                    <p:anim calcmode="lin" valueType="num">
+                                      <p:cBhvr additive="base">
+                                        <p:cTn id="6" dur="500"/>
+                                        <p:tgtEl>
+                                          <p:spTgt spid="18"/>
+                                        </p:tgtEl>
+                                        <p:attrNameLst>
+                                          <p:attrName>ppt_x</p:attrName>
+                                        </p:attrNameLst>
+                                      </p:cBhvr>
+                                      <p:tavLst>
+                                        <p:tav tm="0">
+                                          <p:val>
+                                            <p:strVal val="ppt_x"/>
+                                          </p:val>
+                                        </p:tav>
+                                        <p:tav tm="100000">
+                                          <p:val>
+                                            <p:strVal val="ppt_x"/>
+                                          </p:val>
+                                        </p:tav>
+                                      </p:tavLst>
+                                    </p:anim>
+                                    <p:anim calcmode="lin" valueType="num">
+                                      <p:cBhvr additive="base">
+                                        <p:cTn id="7" dur="500"/>
+                                        <p:tgtEl>
+                                          <p:spTgt spid="18"/>
+                                        </p:tgtEl>
+                                        <p:attrNameLst>
+                                          <p:attrName>ppt_y</p:attrName>
+                                        </p:attrNameLst>
+                                      </p:cBhvr>
+                                      <p:tavLst>
+                                        <p:tav tm="0">
+                                          <p:val>
+                                            <p:strVal val="ppt_y"/>
+                                          </p:val>
+                                        </p:tav>
+                                        <p:tav tm="100000">
+                                          <p:val>
+                                            <p:strVal val="0-ppt_h/2"/>
+                                          </p:val>
+                                        </p:tav>
+                                      </p:tavLst>
+                                    </p:anim>
+                                    <p:set>
+                                      <p:cBhvr>
+                                        <p:cTn id="8" dur="1" fill="hold">
+                                          <p:stCondLst>
+                                            <p:cond delay="499"/>
+                                          </p:stCondLst>
+                                        </p:cTn>
+                                        <p:tgtEl>
+                                          <p:spTgt spid="18"/>
+                                        </p:tgtEl>
+                                        <p:attrNameLst>
+                                          <p:attrName>style.visibility</p:attrName>
+                                        </p:attrNameLst>
+                                      </p:cBhvr>
+                                      <p:to>
+                                        <p:strVal val="hidden"/>
+                                      </p:to>
+                                    </p:set>
+                                  </p:childTnLst>
+                                </p:cTn>
+                              </p:par>
+                              <p:par>
+                                <p:cTn id="9" presetID="2" presetClass="exit" presetSubtype="1" fill="hold" nodeType="withEffect">
+                                  <p:stCondLst>
+                                    <p:cond delay="0"/>
+                                  </p:stCondLst>
+                                  <p:childTnLst>
+                                    <p:anim calcmode="lin" valueType="num">
+                                      <p:cBhvr additive="base">
+                                        <p:cTn id="10" dur="500"/>
+                                        <p:tgtEl>
+                                          <p:spTgt spid="16"/>
+                                        </p:tgtEl>
+                                        <p:attrNameLst>
+                                          <p:attrName>ppt_x</p:attrName>
+                                        </p:attrNameLst>
+                                      </p:cBhvr>
+                                      <p:tavLst>
+                                        <p:tav tm="0">
+                                          <p:val>
+                                            <p:strVal val="ppt_x"/>
+                                          </p:val>
+                                        </p:tav>
+                                        <p:tav tm="100000">
+                                          <p:val>
+                                            <p:strVal val="ppt_x"/>
+                                          </p:val>
+                                        </p:tav>
+                                      </p:tavLst>
+                                    </p:anim>
+                                    <p:anim calcmode="lin" valueType="num">
+                                      <p:cBhvr additive="base">
+                                        <p:cTn id="11" dur="500"/>
+                                        <p:tgtEl>
+                                          <p:spTgt spid="16"/>
+                                        </p:tgtEl>
+                                        <p:attrNameLst>
+                                          <p:attrName>ppt_y</p:attrName>
+                                        </p:attrNameLst>
+                                      </p:cBhvr>
+                                      <p:tavLst>
+                                        <p:tav tm="0">
+                                          <p:val>
+                                            <p:strVal val="ppt_y"/>
+                                          </p:val>
+                                        </p:tav>
+                                        <p:tav tm="100000">
+                                          <p:val>
+                                            <p:strVal val="0-ppt_h/2"/>
+                                          </p:val>
+                                        </p:tav>
+                                      </p:tavLst>
+                                    </p:anim>
+                                    <p:set>
+                                      <p:cBhvr>
+                                        <p:cTn id="12" dur="1" fill="hold">
+                                          <p:stCondLst>
+                                            <p:cond delay="499"/>
+                                          </p:stCondLst>
+                                        </p:cTn>
+                                        <p:tgtEl>
+                                          <p:spTgt spid="16"/>
+                                        </p:tgtEl>
+                                        <p:attrNameLst>
+                                          <p:attrName>style.visibility</p:attrName>
+                                        </p:attrNameLst>
+                                      </p:cBhvr>
+                                      <p:to>
+                                        <p:strVal val="hidden"/>
+                                      </p:to>
+                                    </p:set>
+                                  </p:childTnLst>
+                                </p:cTn>
+                              </p:par>
+                            </p:childTnLst>
+                          </p:cTn>
+                        </p:par>
+                      </p:childTnLst>
+                    </p:cTn>
+                  </p:par>
+                  <p:par>
+                    <p:cTn id="13" fill="hold">
+                      <p:stCondLst>
+                        <p:cond delay="indefinite"/>
+                      </p:stCondLst>
+                      <p:childTnLst>
+                        <p:par>
+                          <p:cTn id="14" fill="hold">
+                            <p:stCondLst>
+                              <p:cond delay="0"/>
+                            </p:stCondLst>
+                            <p:childTnLst>
+                              <p:par>
+                                <p:cTn id="15" presetID="2" presetClass="exit" presetSubtype="1" fill="hold" grpId="0" nodeType="clickEffect">
+                                  <p:stCondLst>
+                                    <p:cond delay="0"/>
+                                  </p:stCondLst>
+                                  <p:childTnLst>
+                                    <p:anim calcmode="lin" valueType="num">
+                                      <p:cBhvr additive="base">
+                                        <p:cTn id="16" dur="500"/>
+                                        <p:tgtEl>
+                                          <p:spTgt spid="15"/>
+                                        </p:tgtEl>
+                                        <p:attrNameLst>
+                                          <p:attrName>ppt_x</p:attrName>
+                                        </p:attrNameLst>
+                                      </p:cBhvr>
+                                      <p:tavLst>
+                                        <p:tav tm="0">
+                                          <p:val>
+                                            <p:strVal val="ppt_x"/>
+                                          </p:val>
+                                        </p:tav>
+                                        <p:tav tm="100000">
+                                          <p:val>
+                                            <p:strVal val="ppt_x"/>
+                                          </p:val>
+                                        </p:tav>
+                                      </p:tavLst>
+                                    </p:anim>
+                                    <p:anim calcmode="lin" valueType="num">
+                                      <p:cBhvr additive="base">
+                                        <p:cTn id="17" dur="500"/>
+                                        <p:tgtEl>
+                                          <p:spTgt spid="15"/>
+                                        </p:tgtEl>
+                                        <p:attrNameLst>
+                                          <p:attrName>ppt_y</p:attrName>
+                                        </p:attrNameLst>
+                                      </p:cBhvr>
+                                      <p:tavLst>
+                                        <p:tav tm="0">
+                                          <p:val>
+                                            <p:strVal val="ppt_y"/>
+                                          </p:val>
+                                        </p:tav>
+                                        <p:tav tm="100000">
+                                          <p:val>
+                                            <p:strVal val="0-ppt_h/2"/>
+                                          </p:val>
+                                        </p:tav>
+                                      </p:tavLst>
+                                    </p:anim>
+                                    <p:set>
+                                      <p:cBhvr>
+                                        <p:cTn id="18" dur="1" fill="hold">
+                                          <p:stCondLst>
+                                            <p:cond delay="499"/>
+                                          </p:stCondLst>
+                                        </p:cTn>
+                                        <p:tgtEl>
+                                          <p:spTgt spid="15"/>
+                                        </p:tgtEl>
+                                        <p:attrNameLst>
+                                          <p:attrName>style.visibility</p:attrName>
+                                        </p:attrNameLst>
+                                      </p:cBhvr>
+                                      <p:to>
+                                        <p:strVal val="hidden"/>
+                                      </p:to>
+                                    </p:set>
+                                  </p:childTnLst>
+                                </p:cTn>
+                              </p:par>
+                              <p:par>
+                                <p:cTn id="19" presetID="2" presetClass="exit" presetSubtype="1" fill="hold" nodeType="withEffect">
+                                  <p:stCondLst>
+                                    <p:cond delay="0"/>
+                                  </p:stCondLst>
+                                  <p:childTnLst>
+                                    <p:anim calcmode="lin" valueType="num">
+                                      <p:cBhvr additive="base">
+                                        <p:cTn id="20" dur="500"/>
+                                        <p:tgtEl>
+                                          <p:spTgt spid="14"/>
+                                        </p:tgtEl>
+                                        <p:attrNameLst>
+                                          <p:attrName>ppt_x</p:attrName>
+                                        </p:attrNameLst>
+                                      </p:cBhvr>
+                                      <p:tavLst>
+                                        <p:tav tm="0">
+                                          <p:val>
+                                            <p:strVal val="ppt_x"/>
+                                          </p:val>
+                                        </p:tav>
+                                        <p:tav tm="100000">
+                                          <p:val>
+                                            <p:strVal val="ppt_x"/>
+                                          </p:val>
+                                        </p:tav>
+                                      </p:tavLst>
+                                    </p:anim>
+                                    <p:anim calcmode="lin" valueType="num">
+                                      <p:cBhvr additive="base">
+                                        <p:cTn id="21" dur="500"/>
+                                        <p:tgtEl>
+                                          <p:spTgt spid="14"/>
+                                        </p:tgtEl>
+                                        <p:attrNameLst>
+                                          <p:attrName>ppt_y</p:attrName>
+                                        </p:attrNameLst>
+                                      </p:cBhvr>
+                                      <p:tavLst>
+                                        <p:tav tm="0">
+                                          <p:val>
+                                            <p:strVal val="ppt_y"/>
+                                          </p:val>
+                                        </p:tav>
+                                        <p:tav tm="100000">
+                                          <p:val>
+                                            <p:strVal val="0-ppt_h/2"/>
+                                          </p:val>
+                                        </p:tav>
+                                      </p:tavLst>
+                                    </p:anim>
+                                    <p:set>
+                                      <p:cBhvr>
+                                        <p:cTn id="22" dur="1" fill="hold">
+                                          <p:stCondLst>
+                                            <p:cond delay="499"/>
+                                          </p:stCondLst>
+                                        </p:cTn>
+                                        <p:tgtEl>
+                                          <p:spTgt spid="14"/>
+                                        </p:tgtEl>
+                                        <p:attrNameLst>
+                                          <p:attrName>style.visibility</p:attrName>
+                                        </p:attrNameLst>
+                                      </p:cBhvr>
+                                      <p:to>
+                                        <p:strVal val="hidden"/>
+                                      </p:to>
+                                    </p:set>
+                                  </p:childTnLst>
+                                </p:cTn>
+                              </p:par>
+                            </p:childTnLst>
+                          </p:cTn>
+                        </p:par>
+                      </p:childTnLst>
+                    </p:cTn>
+                  </p:par>
+                  <p:par>
+                    <p:cTn id="23" fill="hold">
+                      <p:stCondLst>
+                        <p:cond delay="indefinite"/>
+                      </p:stCondLst>
+                      <p:childTnLst>
+                        <p:par>
+                          <p:cTn id="24" fill="hold">
+                            <p:stCondLst>
+                              <p:cond delay="0"/>
+                            </p:stCondLst>
+                            <p:childTnLst>
+                              <p:par>
+                                <p:cTn id="25" presetID="2" presetClass="exit" presetSubtype="1" fill="hold" grpId="0" nodeType="clickEffect">
+                                  <p:stCondLst>
+                                    <p:cond delay="0"/>
+                                  </p:stCondLst>
+                                  <p:childTnLst>
+                                    <p:anim calcmode="lin" valueType="num">
+                                      <p:cBhvr additive="base">
+                                        <p:cTn id="26" dur="500"/>
+                                        <p:tgtEl>
+                                          <p:spTgt spid="13"/>
+                                        </p:tgtEl>
+                                        <p:attrNameLst>
+                                          <p:attrName>ppt_x</p:attrName>
+                                        </p:attrNameLst>
+                                      </p:cBhvr>
+                                      <p:tavLst>
+                                        <p:tav tm="0">
+                                          <p:val>
+                                            <p:strVal val="ppt_x"/>
+                                          </p:val>
+                                        </p:tav>
+                                        <p:tav tm="100000">
+                                          <p:val>
+                                            <p:strVal val="ppt_x"/>
+                                          </p:val>
+                                        </p:tav>
+                                      </p:tavLst>
+                                    </p:anim>
+                                    <p:anim calcmode="lin" valueType="num">
+                                      <p:cBhvr additive="base">
+                                        <p:cTn id="27" dur="500"/>
+                                        <p:tgtEl>
+                                          <p:spTgt spid="13"/>
+                                        </p:tgtEl>
+                                        <p:attrNameLst>
+                                          <p:attrName>ppt_y</p:attrName>
+                                        </p:attrNameLst>
+                                      </p:cBhvr>
+                                      <p:tavLst>
+                                        <p:tav tm="0">
+                                          <p:val>
+                                            <p:strVal val="ppt_y"/>
+                                          </p:val>
+                                        </p:tav>
+                                        <p:tav tm="100000">
+                                          <p:val>
+                                            <p:strVal val="0-ppt_h/2"/>
+                                          </p:val>
+                                        </p:tav>
+                                      </p:tavLst>
+                                    </p:anim>
+                                    <p:set>
+                                      <p:cBhvr>
+                                        <p:cTn id="28" dur="1" fill="hold">
+                                          <p:stCondLst>
+                                            <p:cond delay="499"/>
+                                          </p:stCondLst>
+                                        </p:cTn>
+                                        <p:tgtEl>
+                                          <p:spTgt spid="13"/>
+                                        </p:tgtEl>
+                                        <p:attrNameLst>
+                                          <p:attrName>style.visibility</p:attrName>
+                                        </p:attrNameLst>
+                                      </p:cBhvr>
+                                      <p:to>
+                                        <p:strVal val="hidden"/>
+                                      </p:to>
+                                    </p:set>
+                                  </p:childTnLst>
+                                </p:cTn>
+                              </p:par>
+                              <p:par>
+                                <p:cTn id="29" presetID="2" presetClass="exit" presetSubtype="1" fill="hold" nodeType="withEffect">
+                                  <p:stCondLst>
+                                    <p:cond delay="0"/>
+                                  </p:stCondLst>
+                                  <p:childTnLst>
+                                    <p:anim calcmode="lin" valueType="num">
+                                      <p:cBhvr additive="base">
+                                        <p:cTn id="30" dur="500"/>
+                                        <p:tgtEl>
+                                          <p:spTgt spid="12"/>
+                                        </p:tgtEl>
+                                        <p:attrNameLst>
+                                          <p:attrName>ppt_x</p:attrName>
+                                        </p:attrNameLst>
+                                      </p:cBhvr>
+                                      <p:tavLst>
+                                        <p:tav tm="0">
+                                          <p:val>
+                                            <p:strVal val="ppt_x"/>
+                                          </p:val>
+                                        </p:tav>
+                                        <p:tav tm="100000">
+                                          <p:val>
+                                            <p:strVal val="ppt_x"/>
+                                          </p:val>
+                                        </p:tav>
+                                      </p:tavLst>
+                                    </p:anim>
+                                    <p:anim calcmode="lin" valueType="num">
+                                      <p:cBhvr additive="base">
+                                        <p:cTn id="31" dur="500"/>
+                                        <p:tgtEl>
+                                          <p:spTgt spid="12"/>
+                                        </p:tgtEl>
+                                        <p:attrNameLst>
+                                          <p:attrName>ppt_y</p:attrName>
+                                        </p:attrNameLst>
+                                      </p:cBhvr>
+                                      <p:tavLst>
+                                        <p:tav tm="0">
+                                          <p:val>
+                                            <p:strVal val="ppt_y"/>
+                                          </p:val>
+                                        </p:tav>
+                                        <p:tav tm="100000">
+                                          <p:val>
+                                            <p:strVal val="0-ppt_h/2"/>
+                                          </p:val>
+                                        </p:tav>
+                                      </p:tavLst>
+                                    </p:anim>
+                                    <p:set>
+                                      <p:cBhvr>
+                                        <p:cTn id="32" dur="1" fill="hold">
+                                          <p:stCondLst>
+                                            <p:cond delay="499"/>
+                                          </p:stCondLst>
+                                        </p:cTn>
+                                        <p:tgtEl>
+                                          <p:spTgt spid="12"/>
+                                        </p:tgtEl>
+                                        <p:attrNameLst>
+                                          <p:attrName>style.visibility</p:attrName>
+                                        </p:attrNameLst>
+                                      </p:cBhvr>
+                                      <p:to>
+                                        <p:strVal val="hidden"/>
+                                      </p:to>
+                                    </p:set>
+                                  </p:childTnLst>
+                                </p:cTn>
+                              </p:par>
+                            </p:childTnLst>
+                          </p:cTn>
+                        </p:par>
+                      </p:childTnLst>
+                    </p:cTn>
+                  </p:par>
+                  <p:par>
+                    <p:cTn id="33" fill="hold">
+                      <p:stCondLst>
+                        <p:cond delay="indefinite"/>
+                      </p:stCondLst>
+                      <p:childTnLst>
+                        <p:par>
+                          <p:cTn id="34" fill="hold">
+                            <p:stCondLst>
+                              <p:cond delay="0"/>
+                            </p:stCondLst>
+                            <p:childTnLst>
+                              <p:par>
+                                <p:cTn id="35" presetID="2" presetClass="exit" presetSubtype="1" fill="hold" grpId="0" nodeType="clickEffect">
+                                  <p:stCondLst>
+                                    <p:cond delay="0"/>
+                                  </p:stCondLst>
+                                  <p:childTnLst>
+                                    <p:anim calcmode="lin" valueType="num">
+                                      <p:cBhvr additive="base">
+                                        <p:cTn id="36" dur="500"/>
+                                        <p:tgtEl>
+                                          <p:spTgt spid="11"/>
+                                        </p:tgtEl>
+                                        <p:attrNameLst>
+                                          <p:attrName>ppt_x</p:attrName>
+                                        </p:attrNameLst>
+                                      </p:cBhvr>
+                                      <p:tavLst>
+                                        <p:tav tm="0">
+                                          <p:val>
+                                            <p:strVal val="ppt_x"/>
+                                          </p:val>
+                                        </p:tav>
+                                        <p:tav tm="100000">
+                                          <p:val>
+                                            <p:strVal val="ppt_x"/>
+                                          </p:val>
+                                        </p:tav>
+                                      </p:tavLst>
+                                    </p:anim>
+                                    <p:anim calcmode="lin" valueType="num">
+                                      <p:cBhvr additive="base">
+                                        <p:cTn id="37" dur="500"/>
+                                        <p:tgtEl>
+                                          <p:spTgt spid="11"/>
+                                        </p:tgtEl>
+                                        <p:attrNameLst>
+                                          <p:attrName>ppt_y</p:attrName>
+                                        </p:attrNameLst>
+                                      </p:cBhvr>
+                                      <p:tavLst>
+                                        <p:tav tm="0">
+                                          <p:val>
+                                            <p:strVal val="ppt_y"/>
+                                          </p:val>
+                                        </p:tav>
+                                        <p:tav tm="100000">
+                                          <p:val>
+                                            <p:strVal val="0-ppt_h/2"/>
+                                          </p:val>
+                                        </p:tav>
+                                      </p:tavLst>
+                                    </p:anim>
+                                    <p:set>
+                                      <p:cBhvr>
+                                        <p:cTn id="38" dur="1" fill="hold">
+                                          <p:stCondLst>
+                                            <p:cond delay="499"/>
+                                          </p:stCondLst>
+                                        </p:cTn>
+                                        <p:tgtEl>
+                                          <p:spTgt spid="11"/>
+                                        </p:tgtEl>
+                                        <p:attrNameLst>
+                                          <p:attrName>style.visibility</p:attrName>
+                                        </p:attrNameLst>
+                                      </p:cBhvr>
+                                      <p:to>
+                                        <p:strVal val="hidden"/>
+                                      </p:to>
+                                    </p:set>
+                                  </p:childTnLst>
+                                </p:cTn>
+                              </p:par>
+                              <p:par>
+                                <p:cTn id="39" presetID="2" presetClass="exit" presetSubtype="1" fill="hold" nodeType="withEffect">
+                                  <p:stCondLst>
+                                    <p:cond delay="0"/>
+                                  </p:stCondLst>
+                                  <p:childTnLst>
+                                    <p:anim calcmode="lin" valueType="num">
+                                      <p:cBhvr additive="base">
+                                        <p:cTn id="40" dur="500"/>
+                                        <p:tgtEl>
+                                          <p:spTgt spid="9"/>
+                                        </p:tgtEl>
+                                        <p:attrNameLst>
+                                          <p:attrName>ppt_x</p:attrName>
+                                        </p:attrNameLst>
+                                      </p:cBhvr>
+                                      <p:tavLst>
+                                        <p:tav tm="0">
+                                          <p:val>
+                                            <p:strVal val="ppt_x"/>
+                                          </p:val>
+                                        </p:tav>
+                                        <p:tav tm="100000">
+                                          <p:val>
+                                            <p:strVal val="ppt_x"/>
+                                          </p:val>
+                                        </p:tav>
+                                      </p:tavLst>
+                                    </p:anim>
+                                    <p:anim calcmode="lin" valueType="num">
+                                      <p:cBhvr additive="base">
+                                        <p:cTn id="41" dur="500"/>
+                                        <p:tgtEl>
+                                          <p:spTgt spid="9"/>
+                                        </p:tgtEl>
+                                        <p:attrNameLst>
+                                          <p:attrName>ppt_y</p:attrName>
+                                        </p:attrNameLst>
+                                      </p:cBhvr>
+                                      <p:tavLst>
+                                        <p:tav tm="0">
+                                          <p:val>
+                                            <p:strVal val="ppt_y"/>
+                                          </p:val>
+                                        </p:tav>
+                                        <p:tav tm="100000">
+                                          <p:val>
+                                            <p:strVal val="0-ppt_h/2"/>
+                                          </p:val>
+                                        </p:tav>
+                                      </p:tavLst>
+                                    </p:anim>
+                                    <p:set>
+                                      <p:cBhvr>
+                                        <p:cTn id="42" dur="1" fill="hold">
+                                          <p:stCondLst>
+                                            <p:cond delay="499"/>
+                                          </p:stCondLst>
+                                        </p:cTn>
+                                        <p:tgtEl>
+                                          <p:spTgt spid="9"/>
+                                        </p:tgtEl>
+                                        <p:attrNameLst>
+                                          <p:attrName>style.visibility</p:attrName>
+                                        </p:attrNameLst>
+                                      </p:cBhvr>
+                                      <p:to>
+                                        <p:strVal val="hidden"/>
+                                      </p:to>
+                                    </p:set>
+                                  </p:childTnLst>
+                                </p:cTn>
+                              </p:par>
+                            </p:childTnLst>
+                          </p:cTn>
+                        </p:par>
+                      </p:childTnLst>
+                    </p:cTn>
+                  </p:par>
+                </p:childTnLst>
+              </p:cTn>
+              <p:prevCondLst>
+                <p:cond evt="onPrev" delay="0">
+                  <p:tgtEl>
+                    <p:sldTgt/>
+                  </p:tgtEl>
+                </p:cond>
+              </p:prevCondLst>
+              <p:nextCondLst>
+                <p:cond evt="onNext" delay="0">
+                  <p:tgtEl>
+                    <p:sldTgt/>
+                  </p:tgtEl>
+                </p:cond>
+              </p:nextCondLst>
+            </p:seq>
+          </p:childTnLst>
+        </p:cTn>
+      </p:par>
+    </p:tnLst>
+    <p:bldLst>
+      <p:bldP spid="11" grpId="0"/>
+      <p:bldP spid="13" grpId="0"/>
+      <p:bldP spid="15" grpId="0"/>
+      <p:bldP spid="18" grpId="0"/>
+    </p:bldLst>
+  </p:timing>
+</p:sld>
+</file>
+
+<file path=ppt/slides/slide4.xml><?xml version="1.0" encoding="utf-8"?>
+<p:sld xmlns:a="http://schemas.openxmlformats.org/drawingml/2006/main" xmlns:r="http://schemas.openxmlformats.org/officeDocument/2006/relationships" xmlns:p="http://schemas.openxmlformats.org/presentationml/2006/main">
+  <p:cSld>
+    <p:bg>
+      <p:bgPr>
+        <a:solidFill>
+          <a:schemeClr val="tx1"/>
+        </a:solidFill>
+        <a:effectLst/>
+      </p:bgPr>
+    </p:bg>
+    <p:spTree>
+      <p:nvGrpSpPr>
+        <p:cNvPr id="1" name=""/>
+        <p:cNvGrpSpPr/>
+        <p:nvPr/>
+      </p:nvGrpSpPr>
+      <p:grpSpPr>
+        <a:xfrm>
+          <a:off x="0" y="0"/>
+          <a:ext cx="0" cy="0"/>
+          <a:chOff x="0" y="0"/>
+          <a:chExt cx="0" cy="0"/>
+        </a:xfrm>
+      </p:grpSpPr>
       <p:sp>
         <p:nvSpPr>
           <p:cNvPr id="2" name="Title 1">
@@ -5904,7 +9912,7 @@
 </p:sld>
 </file>
 
-<file path=ppt/slides/slide2.xml><?xml version="1.0" encoding="utf-8"?>
+<file path=ppt/slides/slide5.xml><?xml version="1.0" encoding="utf-8"?>
 <p:sld xmlns:a="http://schemas.openxmlformats.org/drawingml/2006/main" xmlns:r="http://schemas.openxmlformats.org/officeDocument/2006/relationships" xmlns:p="http://schemas.openxmlformats.org/presentationml/2006/main">
   <p:cSld>
     <p:bg>
@@ -5917,7 +9925,13 @@
     </p:bg>
     <p:spTree>
       <p:nvGrpSpPr>
-        <p:cNvPr id="1" name=""/>
+        <p:cNvPr id="1" name="">
+          <a:extLst>
+            <a:ext uri="{FF2B5EF4-FFF2-40B4-BE49-F238E27FC236}">
+              <a16:creationId xmlns:a16="http://schemas.microsoft.com/office/drawing/2014/main" id="{D3180699-D68D-4FC9-A52F-D835B621ED8E}"/>
+            </a:ext>
+          </a:extLst>
+        </p:cNvPr>
         <p:cNvGrpSpPr/>
         <p:nvPr/>
       </p:nvGrpSpPr>
@@ -5934,7 +9948,7 @@
           <p:cNvPr id="2" name="Title 1">
             <a:extLst>
               <a:ext uri="{FF2B5EF4-FFF2-40B4-BE49-F238E27FC236}">
-                <a16:creationId xmlns:a16="http://schemas.microsoft.com/office/drawing/2014/main" id="{6A3DCE86-C2BA-4713-9E7A-73589E8D6CCF}"/>
+                <a16:creationId xmlns:a16="http://schemas.microsoft.com/office/drawing/2014/main" id="{3A54C377-E0B3-8D00-4BFD-AD7A16D0B45B}"/>
               </a:ext>
             </a:extLst>
           </p:cNvPr>
@@ -5979,7 +9993,7 @@
           <p:cNvPr id="6" name="TextBox 5">
             <a:extLst>
               <a:ext uri="{FF2B5EF4-FFF2-40B4-BE49-F238E27FC236}">
-                <a16:creationId xmlns:a16="http://schemas.microsoft.com/office/drawing/2014/main" id="{789D1453-75F7-57B1-AD86-D3F46D5E27F8}"/>
+                <a16:creationId xmlns:a16="http://schemas.microsoft.com/office/drawing/2014/main" id="{ACDAB817-626C-A90D-4CDD-CE80FCEA96AD}"/>
               </a:ext>
             </a:extLst>
           </p:cNvPr>
@@ -6018,20 +10032,14 @@
           <p:cNvPr id="10" name="Table 10">
             <a:extLst>
               <a:ext uri="{FF2B5EF4-FFF2-40B4-BE49-F238E27FC236}">
-                <a16:creationId xmlns:a16="http://schemas.microsoft.com/office/drawing/2014/main" id="{DEF2D023-8AA3-C0A9-D29B-CBC2D2F1DB08}"/>
+                <a16:creationId xmlns:a16="http://schemas.microsoft.com/office/drawing/2014/main" id="{CDA891B9-9EE1-2CC5-9481-63C82FC2ED28}"/>
               </a:ext>
             </a:extLst>
           </p:cNvPr>
           <p:cNvGraphicFramePr>
             <a:graphicFrameLocks noGrp="1"/>
           </p:cNvGraphicFramePr>
-          <p:nvPr>
-            <p:extLst>
-              <p:ext uri="{D42A27DB-BD31-4B8C-83A1-F6EECF244321}">
-                <p14:modId xmlns:p14="http://schemas.microsoft.com/office/powerpoint/2010/main" val="1717877297"/>
-              </p:ext>
-            </p:extLst>
-          </p:nvPr>
+          <p:nvPr/>
         </p:nvGraphicFramePr>
         <p:xfrm>
           <a:off x="1098139" y="1934384"/>
@@ -6557,7 +10565,7 @@
           <p:cNvPr id="27" name="Picture 26">
             <a:extLst>
               <a:ext uri="{FF2B5EF4-FFF2-40B4-BE49-F238E27FC236}">
-                <a16:creationId xmlns:a16="http://schemas.microsoft.com/office/drawing/2014/main" id="{E749BDAF-05AD-202B-3586-980967612DD0}"/>
+                <a16:creationId xmlns:a16="http://schemas.microsoft.com/office/drawing/2014/main" id="{BA25A963-F25E-F526-CA33-973D0E6AFFC8}"/>
               </a:ext>
             </a:extLst>
           </p:cNvPr>
@@ -6596,20 +10604,14 @@
           <p:cNvPr id="31" name="Table 31">
             <a:extLst>
               <a:ext uri="{FF2B5EF4-FFF2-40B4-BE49-F238E27FC236}">
-                <a16:creationId xmlns:a16="http://schemas.microsoft.com/office/drawing/2014/main" id="{3EDA3525-D1AC-4B39-4628-DE727256DAB8}"/>
+                <a16:creationId xmlns:a16="http://schemas.microsoft.com/office/drawing/2014/main" id="{4B5AF023-0DCC-8542-9BDE-00B14EB6689F}"/>
               </a:ext>
             </a:extLst>
           </p:cNvPr>
           <p:cNvGraphicFramePr>
             <a:graphicFrameLocks noGrp="1"/>
           </p:cNvGraphicFramePr>
-          <p:nvPr>
-            <p:extLst>
-              <p:ext uri="{D42A27DB-BD31-4B8C-83A1-F6EECF244321}">
-                <p14:modId xmlns:p14="http://schemas.microsoft.com/office/powerpoint/2010/main" val="3688971945"/>
-              </p:ext>
-            </p:extLst>
-          </p:nvPr>
+          <p:nvPr/>
         </p:nvGraphicFramePr>
         <p:xfrm>
           <a:off x="8205058" y="3532910"/>
@@ -6859,7 +10861,7 @@
           <p:cNvPr id="19" name="Picture 18">
             <a:extLst>
               <a:ext uri="{FF2B5EF4-FFF2-40B4-BE49-F238E27FC236}">
-                <a16:creationId xmlns:a16="http://schemas.microsoft.com/office/drawing/2014/main" id="{E69FB9D7-1D76-44ED-1581-92874D881BAC}"/>
+                <a16:creationId xmlns:a16="http://schemas.microsoft.com/office/drawing/2014/main" id="{DE7E1DB4-C6CD-0689-A6AE-BF00530C61CC}"/>
               </a:ext>
             </a:extLst>
           </p:cNvPr>
@@ -6898,7 +10900,7 @@
           <p:cNvPr id="7" name="TextBox 6">
             <a:extLst>
               <a:ext uri="{FF2B5EF4-FFF2-40B4-BE49-F238E27FC236}">
-                <a16:creationId xmlns:a16="http://schemas.microsoft.com/office/drawing/2014/main" id="{7E5B6A71-EA6A-BC06-B4B3-36F0BED54F3E}"/>
+                <a16:creationId xmlns:a16="http://schemas.microsoft.com/office/drawing/2014/main" id="{340D5F48-9A93-B4C8-B3D7-E308D7955071}"/>
               </a:ext>
             </a:extLst>
           </p:cNvPr>
@@ -6937,7 +10939,7 @@
           <p:cNvPr id="33" name="TextBox 32">
             <a:extLst>
               <a:ext uri="{FF2B5EF4-FFF2-40B4-BE49-F238E27FC236}">
-                <a16:creationId xmlns:a16="http://schemas.microsoft.com/office/drawing/2014/main" id="{592FAA83-41FF-8CBF-2008-51F174926A89}"/>
+                <a16:creationId xmlns:a16="http://schemas.microsoft.com/office/drawing/2014/main" id="{8AC652FD-7550-4BC5-1182-174D7CCE5EDF}"/>
               </a:ext>
             </a:extLst>
           </p:cNvPr>
@@ -6986,7 +10988,7 @@
           <p:cNvPr id="35" name="TextBox 34">
             <a:extLst>
               <a:ext uri="{FF2B5EF4-FFF2-40B4-BE49-F238E27FC236}">
-                <a16:creationId xmlns:a16="http://schemas.microsoft.com/office/drawing/2014/main" id="{B33FBCC3-4573-0F0F-8EC2-7D331720FD53}"/>
+                <a16:creationId xmlns:a16="http://schemas.microsoft.com/office/drawing/2014/main" id="{BC2B7AB9-9B1D-09B2-F8E0-0CC32A676FDB}"/>
               </a:ext>
             </a:extLst>
           </p:cNvPr>
@@ -7025,7 +11027,7 @@
           <p:cNvPr id="36" name="TextBox 35">
             <a:extLst>
               <a:ext uri="{FF2B5EF4-FFF2-40B4-BE49-F238E27FC236}">
-                <a16:creationId xmlns:a16="http://schemas.microsoft.com/office/drawing/2014/main" id="{7FE7C2D5-6966-A2FD-1142-E7157E3DEC01}"/>
+                <a16:creationId xmlns:a16="http://schemas.microsoft.com/office/drawing/2014/main" id="{7E6A41C2-9FD5-CE84-9491-0F37DF167844}"/>
               </a:ext>
             </a:extLst>
           </p:cNvPr>
@@ -7074,7 +11076,7 @@
           <p:cNvPr id="17" name="Picture 16" descr="A picture containing shirt&#10;&#10;Description automatically generated">
             <a:extLst>
               <a:ext uri="{FF2B5EF4-FFF2-40B4-BE49-F238E27FC236}">
-                <a16:creationId xmlns:a16="http://schemas.microsoft.com/office/drawing/2014/main" id="{CBC0D990-F61C-886D-0174-0C9734DFFE8B}"/>
+                <a16:creationId xmlns:a16="http://schemas.microsoft.com/office/drawing/2014/main" id="{B8FDEF7F-77DE-30C0-5355-3B683301989E}"/>
               </a:ext>
             </a:extLst>
           </p:cNvPr>
@@ -7113,7 +11115,7 @@
           <p:cNvPr id="28" name="Picture 27" descr="A picture containing shirt&#10;&#10;Description automatically generated">
             <a:extLst>
               <a:ext uri="{FF2B5EF4-FFF2-40B4-BE49-F238E27FC236}">
-                <a16:creationId xmlns:a16="http://schemas.microsoft.com/office/drawing/2014/main" id="{6BE3D923-EBC4-EEEF-2D1F-D1409C2B1B26}"/>
+                <a16:creationId xmlns:a16="http://schemas.microsoft.com/office/drawing/2014/main" id="{E0A8C6A8-CC77-8B06-B21D-26A70C4E8353}"/>
               </a:ext>
             </a:extLst>
           </p:cNvPr>
@@ -7152,7 +11154,7 @@
           <p:cNvPr id="23" name="TextBox 22">
             <a:extLst>
               <a:ext uri="{FF2B5EF4-FFF2-40B4-BE49-F238E27FC236}">
-                <a16:creationId xmlns:a16="http://schemas.microsoft.com/office/drawing/2014/main" id="{BF115CEE-E235-4D4E-1E6C-C43EC955CAE5}"/>
+                <a16:creationId xmlns:a16="http://schemas.microsoft.com/office/drawing/2014/main" id="{A2E37D01-3DED-8E7D-02BA-64FF7E666094}"/>
               </a:ext>
             </a:extLst>
           </p:cNvPr>
@@ -7191,7 +11193,7 @@
           <p:cNvPr id="37" name="TextBox 36">
             <a:extLst>
               <a:ext uri="{FF2B5EF4-FFF2-40B4-BE49-F238E27FC236}">
-                <a16:creationId xmlns:a16="http://schemas.microsoft.com/office/drawing/2014/main" id="{77D901AC-4A5F-0473-6B23-69F7558EE895}"/>
+                <a16:creationId xmlns:a16="http://schemas.microsoft.com/office/drawing/2014/main" id="{C6C22AD1-AFA5-7ADA-D7F0-598555440466}"/>
               </a:ext>
             </a:extLst>
           </p:cNvPr>
@@ -7230,7 +11232,7 @@
           <p:cNvPr id="26" name="Picture 25" descr="Diagram&#10;&#10;Description automatically generated with low confidence">
             <a:extLst>
               <a:ext uri="{FF2B5EF4-FFF2-40B4-BE49-F238E27FC236}">
-                <a16:creationId xmlns:a16="http://schemas.microsoft.com/office/drawing/2014/main" id="{224C7777-5A04-AE76-6E42-09F1556BA93B}"/>
+                <a16:creationId xmlns:a16="http://schemas.microsoft.com/office/drawing/2014/main" id="{5F4DFF46-9948-AE1B-2528-02E9B953078D}"/>
               </a:ext>
             </a:extLst>
           </p:cNvPr>
@@ -7269,7 +11271,7 @@
           <p:cNvPr id="29" name="Picture 28" descr="Diagram&#10;&#10;Description automatically generated with low confidence">
             <a:extLst>
               <a:ext uri="{FF2B5EF4-FFF2-40B4-BE49-F238E27FC236}">
-                <a16:creationId xmlns:a16="http://schemas.microsoft.com/office/drawing/2014/main" id="{F0AA8856-CBD9-9170-31D3-E789AC8FE013}"/>
+                <a16:creationId xmlns:a16="http://schemas.microsoft.com/office/drawing/2014/main" id="{D3BAD059-F512-59F3-D571-2629A7D577C5}"/>
               </a:ext>
             </a:extLst>
           </p:cNvPr>
@@ -7308,7 +11310,7 @@
           <p:cNvPr id="32" name="TextBox 31">
             <a:extLst>
               <a:ext uri="{FF2B5EF4-FFF2-40B4-BE49-F238E27FC236}">
-                <a16:creationId xmlns:a16="http://schemas.microsoft.com/office/drawing/2014/main" id="{E08FE999-4863-F223-3AA6-127C41BDAB52}"/>
+                <a16:creationId xmlns:a16="http://schemas.microsoft.com/office/drawing/2014/main" id="{4616C6BF-28EF-A0DD-B52B-93E0DF5BA894}"/>
               </a:ext>
             </a:extLst>
           </p:cNvPr>
@@ -7347,7 +11349,7 @@
           <p:cNvPr id="38" name="TextBox 37">
             <a:extLst>
               <a:ext uri="{FF2B5EF4-FFF2-40B4-BE49-F238E27FC236}">
-                <a16:creationId xmlns:a16="http://schemas.microsoft.com/office/drawing/2014/main" id="{0CC4A1A5-8137-8664-3CCF-74C048507E63}"/>
+                <a16:creationId xmlns:a16="http://schemas.microsoft.com/office/drawing/2014/main" id="{9DB4D4E6-7A67-BDEA-EBDE-A05B90D6AA3F}"/>
               </a:ext>
             </a:extLst>
           </p:cNvPr>
@@ -7386,7 +11388,7 @@
           <p:cNvPr id="39" name="TextBox 38">
             <a:extLst>
               <a:ext uri="{FF2B5EF4-FFF2-40B4-BE49-F238E27FC236}">
-                <a16:creationId xmlns:a16="http://schemas.microsoft.com/office/drawing/2014/main" id="{A2316301-B622-6F7D-A988-42F5DB2C427E}"/>
+                <a16:creationId xmlns:a16="http://schemas.microsoft.com/office/drawing/2014/main" id="{2133F379-AEB8-B12B-E1E3-B7BC35FC854F}"/>
               </a:ext>
             </a:extLst>
           </p:cNvPr>
@@ -7435,7 +11437,7 @@
           <p:cNvPr id="40" name="TextBox 39">
             <a:extLst>
               <a:ext uri="{FF2B5EF4-FFF2-40B4-BE49-F238E27FC236}">
-                <a16:creationId xmlns:a16="http://schemas.microsoft.com/office/drawing/2014/main" id="{AF499E92-49DB-EEB7-ECAE-FAE080DBDD72}"/>
+                <a16:creationId xmlns:a16="http://schemas.microsoft.com/office/drawing/2014/main" id="{1516DC3C-2366-9EEB-6B73-424996AE17DC}"/>
               </a:ext>
             </a:extLst>
           </p:cNvPr>
@@ -7484,7 +11486,7 @@
           <p:cNvPr id="24" name="Picture 23" descr="Diagram&#10;&#10;Description automatically generated">
             <a:extLst>
               <a:ext uri="{FF2B5EF4-FFF2-40B4-BE49-F238E27FC236}">
-                <a16:creationId xmlns:a16="http://schemas.microsoft.com/office/drawing/2014/main" id="{E7805405-62A9-D8B6-F101-E4F92391F410}"/>
+                <a16:creationId xmlns:a16="http://schemas.microsoft.com/office/drawing/2014/main" id="{EA82E074-2BDB-D10E-80C4-6FB5F09C618C}"/>
               </a:ext>
             </a:extLst>
           </p:cNvPr>
@@ -7523,7 +11525,7 @@
           <p:cNvPr id="30" name="Picture 29" descr="Diagram&#10;&#10;Description automatically generated">
             <a:extLst>
               <a:ext uri="{FF2B5EF4-FFF2-40B4-BE49-F238E27FC236}">
-                <a16:creationId xmlns:a16="http://schemas.microsoft.com/office/drawing/2014/main" id="{7FD09284-0307-0253-E160-5FB1B77DF8F5}"/>
+                <a16:creationId xmlns:a16="http://schemas.microsoft.com/office/drawing/2014/main" id="{DEFFC802-2250-EAD8-C6E1-807E9515285A}"/>
               </a:ext>
             </a:extLst>
           </p:cNvPr>
@@ -7562,7 +11564,7 @@
           <p:cNvPr id="25" name="TextBox 24">
             <a:extLst>
               <a:ext uri="{FF2B5EF4-FFF2-40B4-BE49-F238E27FC236}">
-                <a16:creationId xmlns:a16="http://schemas.microsoft.com/office/drawing/2014/main" id="{EE294A7E-9AD2-6237-23A3-9D3897029C4C}"/>
+                <a16:creationId xmlns:a16="http://schemas.microsoft.com/office/drawing/2014/main" id="{26AC248A-5924-C16B-F109-96EF84DF5F74}"/>
               </a:ext>
             </a:extLst>
           </p:cNvPr>
@@ -7601,7 +11603,7 @@
           <p:cNvPr id="41" name="TextBox 40">
             <a:extLst>
               <a:ext uri="{FF2B5EF4-FFF2-40B4-BE49-F238E27FC236}">
-                <a16:creationId xmlns:a16="http://schemas.microsoft.com/office/drawing/2014/main" id="{6E9802A0-DC44-241F-7C09-E15160BA19C1}"/>
+                <a16:creationId xmlns:a16="http://schemas.microsoft.com/office/drawing/2014/main" id="{579F4A0A-7BB4-8F0A-83BA-A043C9AB72C2}"/>
               </a:ext>
             </a:extLst>
           </p:cNvPr>
@@ -7640,7 +11642,7 @@
           <p:cNvPr id="11" name="TextBox 10">
             <a:extLst>
               <a:ext uri="{FF2B5EF4-FFF2-40B4-BE49-F238E27FC236}">
-                <a16:creationId xmlns:a16="http://schemas.microsoft.com/office/drawing/2014/main" id="{8771247C-93D5-9CC7-A422-ADECD5FEEDEE}"/>
+                <a16:creationId xmlns:a16="http://schemas.microsoft.com/office/drawing/2014/main" id="{7B84C5B9-A2F4-AD7E-025E-EE301E27E2C7}"/>
               </a:ext>
             </a:extLst>
           </p:cNvPr>
@@ -7677,7 +11679,7 @@
     </p:spTree>
     <p:extLst>
       <p:ext uri="{BB962C8B-B14F-4D97-AF65-F5344CB8AC3E}">
-        <p14:creationId xmlns:p14="http://schemas.microsoft.com/office/powerpoint/2010/main" val="2301016541"/>
+        <p14:creationId xmlns:p14="http://schemas.microsoft.com/office/powerpoint/2010/main" val="2527923727"/>
       </p:ext>
     </p:extLst>
   </p:cSld>
@@ -9085,7 +13087,7 @@
 </p:sld>
 </file>
 
-<file path=ppt/slides/slide3.xml><?xml version="1.0" encoding="utf-8"?>
+<file path=ppt/slides/slide6.xml><?xml version="1.0" encoding="utf-8"?>
 <p:sld xmlns:a="http://schemas.openxmlformats.org/drawingml/2006/main" xmlns:r="http://schemas.openxmlformats.org/officeDocument/2006/relationships" xmlns:p="http://schemas.openxmlformats.org/presentationml/2006/main">
   <p:cSld>
     <p:bg>
@@ -12124,7 +16126,7 @@
 </p:sld>
 </file>
 
-<file path=ppt/slides/slide4.xml><?xml version="1.0" encoding="utf-8"?>
+<file path=ppt/slides/slide7.xml><?xml version="1.0" encoding="utf-8"?>
 <p:sld xmlns:a="http://schemas.openxmlformats.org/drawingml/2006/main" xmlns:r="http://schemas.openxmlformats.org/officeDocument/2006/relationships" xmlns:p="http://schemas.openxmlformats.org/presentationml/2006/main">
   <p:cSld>
     <p:bg>
@@ -13928,7 +17930,7 @@
 </p:sld>
 </file>
 
-<file path=ppt/slides/slide5.xml><?xml version="1.0" encoding="utf-8"?>
+<file path=ppt/slides/slide8.xml><?xml version="1.0" encoding="utf-8"?>
 <p:sld xmlns:a="http://schemas.openxmlformats.org/drawingml/2006/main" xmlns:r="http://schemas.openxmlformats.org/officeDocument/2006/relationships" xmlns:p="http://schemas.openxmlformats.org/presentationml/2006/main">
   <p:cSld>
     <p:bg>
@@ -17458,7 +21460,7 @@
 </p:sld>
 </file>
 
-<file path=ppt/slides/slide6.xml><?xml version="1.0" encoding="utf-8"?>
+<file path=ppt/slides/slide9.xml><?xml version="1.0" encoding="utf-8"?>
 <p:sld xmlns:a="http://schemas.openxmlformats.org/drawingml/2006/main" xmlns:r="http://schemas.openxmlformats.org/officeDocument/2006/relationships" xmlns:p="http://schemas.openxmlformats.org/presentationml/2006/main">
   <p:cSld>
     <p:bg>
@@ -21443,6 +25445,21 @@
 </file>
 
 <file path=customXml/item1.xml><?xml version="1.0" encoding="utf-8"?>
+<?mso-contentType ?>
+<FormTemplates xmlns="http://schemas.microsoft.com/sharepoint/v3/contenttype/forms">
+  <Display>DocumentLibraryForm</Display>
+  <Edit>DocumentLibraryForm</Edit>
+  <New>DocumentLibraryForm</New>
+</FormTemplates>
+</file>
+
+<file path=customXml/item2.xml><?xml version="1.0" encoding="utf-8"?>
+<p:properties xmlns:p="http://schemas.microsoft.com/office/2006/metadata/properties" xmlns:xsi="http://www.w3.org/2001/XMLSchema-instance" xmlns:pc="http://schemas.microsoft.com/office/infopath/2007/PartnerControls">
+  <documentManagement/>
+</p:properties>
+</file>
+
+<file path=customXml/item3.xml><?xml version="1.0" encoding="utf-8"?>
 <ct:contentTypeSchema xmlns:ct="http://schemas.microsoft.com/office/2006/metadata/contentType" xmlns:ma="http://schemas.microsoft.com/office/2006/metadata/properties/metaAttributes" ct:_="" ma:_="" ma:contentTypeName="Document" ma:contentTypeID="0x0101007188BDCA587B344BBA6CB1A93FAE6998" ma:contentTypeVersion="2" ma:contentTypeDescription="Create a new document." ma:contentTypeScope="" ma:versionID="7a8e4b6720badb2566a0cfeddfaf2856">
   <xsd:schema xmlns:xsd="http://www.w3.org/2001/XMLSchema" xmlns:xs="http://www.w3.org/2001/XMLSchema" xmlns:p="http://schemas.microsoft.com/office/2006/metadata/properties" xmlns:ns2="ba111d12-426d-4af0-bcb6-460e36974645" targetNamespace="http://schemas.microsoft.com/office/2006/metadata/properties" ma:root="true" ma:fieldsID="989b05398519136c88ba0a8d54e3c3da" ns2:_="">
     <xsd:import namespace="ba111d12-426d-4af0-bcb6-460e36974645"/>
@@ -21574,22 +25591,24 @@
 </ct:contentTypeSchema>
 </file>
 
-<file path=customXml/item2.xml><?xml version="1.0" encoding="utf-8"?>
-<p:properties xmlns:p="http://schemas.microsoft.com/office/2006/metadata/properties" xmlns:xsi="http://www.w3.org/2001/XMLSchema-instance" xmlns:pc="http://schemas.microsoft.com/office/infopath/2007/PartnerControls">
-  <documentManagement/>
-</p:properties>
+<file path=customXml/itemProps1.xml><?xml version="1.0" encoding="utf-8"?>
+<ds:datastoreItem xmlns:ds="http://schemas.openxmlformats.org/officeDocument/2006/customXml" ds:itemID="{C598EE6F-E26B-42BB-A8C4-ECA40997D302}">
+  <ds:schemaRefs>
+    <ds:schemaRef ds:uri="http://schemas.microsoft.com/sharepoint/v3/contenttype/forms"/>
+  </ds:schemaRefs>
+</ds:datastoreItem>
 </file>
 
-<file path=customXml/item3.xml><?xml version="1.0" encoding="utf-8"?>
-<?mso-contentType ?>
-<FormTemplates xmlns="http://schemas.microsoft.com/sharepoint/v3/contenttype/forms">
-  <Display>DocumentLibraryForm</Display>
-  <Edit>DocumentLibraryForm</Edit>
-  <New>DocumentLibraryForm</New>
-</FormTemplates>
+<file path=customXml/itemProps2.xml><?xml version="1.0" encoding="utf-8"?>
+<ds:datastoreItem xmlns:ds="http://schemas.openxmlformats.org/officeDocument/2006/customXml" ds:itemID="{857C6131-C561-4201-AE06-D21CDE528BF4}">
+  <ds:schemaRefs>
+    <ds:schemaRef ds:uri="http://schemas.microsoft.com/office/2006/metadata/properties"/>
+    <ds:schemaRef ds:uri="http://schemas.microsoft.com/office/infopath/2007/PartnerControls"/>
+  </ds:schemaRefs>
+</ds:datastoreItem>
 </file>
 
-<file path=customXml/itemProps1.xml><?xml version="1.0" encoding="utf-8"?>
+<file path=customXml/itemProps3.xml><?xml version="1.0" encoding="utf-8"?>
 <ds:datastoreItem xmlns:ds="http://schemas.openxmlformats.org/officeDocument/2006/customXml" ds:itemID="{96C2DE78-7F75-46EF-BA1C-8DDDE33EBFA6}">
   <ds:schemaRefs>
     <ds:schemaRef ds:uri="http://schemas.microsoft.com/office/2006/metadata/contentType"/>
@@ -21605,21 +25624,4 @@
     <ds:schemaRef ds:uri="http://schemas.microsoft.com/internal/obd"/>
   </ds:schemaRefs>
 </ds:datastoreItem>
-</file>
-
-<file path=customXml/itemProps2.xml><?xml version="1.0" encoding="utf-8"?>
-<ds:datastoreItem xmlns:ds="http://schemas.openxmlformats.org/officeDocument/2006/customXml" ds:itemID="{857C6131-C561-4201-AE06-D21CDE528BF4}">
-  <ds:schemaRefs>
-    <ds:schemaRef ds:uri="http://schemas.microsoft.com/office/2006/metadata/properties"/>
-    <ds:schemaRef ds:uri="http://schemas.microsoft.com/office/infopath/2007/PartnerControls"/>
-  </ds:schemaRefs>
-</ds:datastoreItem>
-</file>
-
-<file path=customXml/itemProps3.xml><?xml version="1.0" encoding="utf-8"?>
-<ds:datastoreItem xmlns:ds="http://schemas.openxmlformats.org/officeDocument/2006/customXml" ds:itemID="{C598EE6F-E26B-42BB-A8C4-ECA40997D302}">
-  <ds:schemaRefs>
-    <ds:schemaRef ds:uri="http://schemas.microsoft.com/sharepoint/v3/contenttype/forms"/>
-  </ds:schemaRefs>
-</ds:datastoreItem>
 </file>